--- a/research-materials/slides/07_発表①_20270217_修士論文公聴会.pptx
+++ b/research-materials/slides/07_発表①_20270217_修士論文公聴会.pptx
@@ -163,8 +163,11 @@
                 <a:solidFill>
                   <a:srgbClr val="0B3C6E"/>
                 </a:solidFill>
-              </a:rPr>
-              <a:t>パス係数（性格特性の関連は |β|≦.21）</a:t>
+                <a:latin typeface="BIZ UDPゴシック"/>
+                <a:ea typeface="BIZ UDPゴシック"/>
+                <a:cs typeface="BIZ UDPゴシック"/>
+              </a:rPr>
+              <a:t>パス係数（性格特性は .21 以下）</a:t>
             </a:r>
           </a:p>
         </c:rich>
@@ -186,7 +189,7 @@
               <c:strCache>
                 <c:ptCount val="1"/>
                 <c:pt idx="0">
-                  <c:v>β</c:v>
+                  <c:v>係数</c:v>
                 </c:pt>
               </c:strCache>
             </c:strRef>
@@ -282,6 +285,9 @@
                   <a:solidFill>
                     <a:srgbClr val="24303F"/>
                   </a:solidFill>
+                  <a:latin typeface="BIZ UDPゴシック"/>
+                  <a:ea typeface="BIZ UDPゴシック"/>
+                  <a:cs typeface="BIZ UDPゴシック"/>
                 </a:defRPr>
               </a:pPr>
             </a:p>
@@ -325,6 +331,9 @@
                 <a:solidFill>
                   <a:srgbClr val="24303F"/>
                 </a:solidFill>
+                <a:latin typeface="BIZ UDPゴシック"/>
+                <a:ea typeface="BIZ UDPゴシック"/>
+                <a:cs typeface="BIZ UDPゴシック"/>
               </a:defRPr>
             </a:pPr>
           </a:p>
@@ -371,6 +380,9 @@
                 <a:solidFill>
                   <a:srgbClr val="5A6676"/>
                 </a:solidFill>
+                <a:latin typeface="BIZ UDPゴシック"/>
+                <a:ea typeface="BIZ UDPゴシック"/>
+                <a:cs typeface="BIZ UDPゴシック"/>
               </a:defRPr>
             </a:pPr>
           </a:p>
@@ -391,9 +403,16 @@
           <a:solidFill>
             <a:srgbClr val="5A6676"/>
           </a:solidFill>
+          <a:latin typeface="BIZ UDPゴシック"/>
+          <a:ea typeface="BIZ UDPゴシック"/>
+          <a:cs typeface="BIZ UDPゴシック"/>
         </a:defRPr>
       </a:pPr>
-      <a:endParaRPr lang="en-US"/>
+      <a:endParaRPr lang="en-US">
+        <a:latin typeface="BIZ UDPゴシック"/>
+        <a:ea typeface="BIZ UDPゴシック"/>
+        <a:cs typeface="BIZ UDPゴシック"/>
+      </a:endParaRPr>
     </a:p>
   </c:txPr>
   <c:externalData r:id="rId1">
@@ -417,6 +436,9 @@
                 <a:solidFill>
                   <a:srgbClr val="0B3C6E"/>
                 </a:solidFill>
+                <a:latin typeface="BIZ UDPゴシック"/>
+                <a:ea typeface="BIZ UDPゴシック"/>
+                <a:cs typeface="BIZ UDPゴシック"/>
               </a:rPr>
               <a:t>理想の頻度：増やしたい ＞ 減らしたい</a:t>
             </a:r>
@@ -522,6 +544,9 @@
                   <a:solidFill>
                     <a:srgbClr val="24303F"/>
                   </a:solidFill>
+                  <a:latin typeface="BIZ UDPゴシック"/>
+                  <a:ea typeface="BIZ UDPゴシック"/>
+                  <a:cs typeface="BIZ UDPゴシック"/>
                 </a:defRPr>
               </a:pPr>
             </a:p>
@@ -565,6 +590,9 @@
                 <a:solidFill>
                   <a:srgbClr val="24303F"/>
                 </a:solidFill>
+                <a:latin typeface="BIZ UDPゴシック"/>
+                <a:ea typeface="BIZ UDPゴシック"/>
+                <a:cs typeface="BIZ UDPゴシック"/>
               </a:defRPr>
             </a:pPr>
           </a:p>
@@ -611,6 +639,9 @@
                 <a:solidFill>
                   <a:srgbClr val="5A6676"/>
                 </a:solidFill>
+                <a:latin typeface="BIZ UDPゴシック"/>
+                <a:ea typeface="BIZ UDPゴシック"/>
+                <a:cs typeface="BIZ UDPゴシック"/>
               </a:defRPr>
             </a:pPr>
           </a:p>
@@ -630,9 +661,16 @@
           <a:solidFill>
             <a:srgbClr val="5A6676"/>
           </a:solidFill>
+          <a:latin typeface="BIZ UDPゴシック"/>
+          <a:ea typeface="BIZ UDPゴシック"/>
+          <a:cs typeface="BIZ UDPゴシック"/>
         </a:defRPr>
       </a:pPr>
-      <a:endParaRPr lang="en-US"/>
+      <a:endParaRPr lang="en-US">
+        <a:latin typeface="BIZ UDPゴシック"/>
+        <a:ea typeface="BIZ UDPゴシック"/>
+        <a:cs typeface="BIZ UDPゴシック"/>
+      </a:endParaRPr>
     </a:p>
   </c:txPr>
   <c:externalData r:id="rId1">
@@ -656,6 +694,9 @@
                 <a:solidFill>
                   <a:srgbClr val="0B3C6E"/>
                 </a:solidFill>
+                <a:latin typeface="BIZ UDPゴシック"/>
+                <a:ea typeface="BIZ UDPゴシック"/>
+                <a:cs typeface="BIZ UDPゴシック"/>
               </a:rPr>
               <a:t>80%予測区間の幅（±・参加者平均）</a:t>
             </a:r>
@@ -781,6 +822,9 @@
                   <a:solidFill>
                     <a:srgbClr val="24303F"/>
                   </a:solidFill>
+                  <a:latin typeface="BIZ UDPゴシック"/>
+                  <a:ea typeface="BIZ UDPゴシック"/>
+                  <a:cs typeface="BIZ UDPゴシック"/>
                 </a:defRPr>
               </a:pPr>
             </a:p>
@@ -825,6 +869,9 @@
                 <a:solidFill>
                   <a:srgbClr val="24303F"/>
                 </a:solidFill>
+                <a:latin typeface="BIZ UDPゴシック"/>
+                <a:ea typeface="BIZ UDPゴシック"/>
+                <a:cs typeface="BIZ UDPゴシック"/>
               </a:defRPr>
             </a:pPr>
           </a:p>
@@ -871,6 +918,9 @@
                 <a:solidFill>
                   <a:srgbClr val="5A6676"/>
                 </a:solidFill>
+                <a:latin typeface="BIZ UDPゴシック"/>
+                <a:ea typeface="BIZ UDPゴシック"/>
+                <a:cs typeface="BIZ UDPゴシック"/>
               </a:defRPr>
             </a:pPr>
           </a:p>
@@ -888,7 +938,11 @@
         <a:lstStyle/>
         <a:p>
           <a:pPr>
-            <a:defRPr sz="1100"/>
+            <a:defRPr sz="1100">
+              <a:latin typeface="BIZ UDPゴシック"/>
+              <a:ea typeface="BIZ UDPゴシック"/>
+              <a:cs typeface="BIZ UDPゴシック"/>
+            </a:defRPr>
           </a:pPr>
         </a:p>
       </c:txPr>
@@ -904,9 +958,16 @@
           <a:solidFill>
             <a:srgbClr val="5A6676"/>
           </a:solidFill>
+          <a:latin typeface="BIZ UDPゴシック"/>
+          <a:ea typeface="BIZ UDPゴシック"/>
+          <a:cs typeface="BIZ UDPゴシック"/>
         </a:defRPr>
       </a:pPr>
-      <a:endParaRPr lang="en-US"/>
+      <a:endParaRPr lang="en-US">
+        <a:latin typeface="BIZ UDPゴシック"/>
+        <a:ea typeface="BIZ UDPゴシック"/>
+        <a:cs typeface="BIZ UDPゴシック"/>
+      </a:endParaRPr>
     </a:p>
   </c:txPr>
   <c:externalData r:id="rId1">
@@ -929,6 +990,9 @@
                 <a:solidFill>
                   <a:srgbClr val="0B3C6E"/>
                 </a:solidFill>
+                <a:latin typeface="BIZ UDPゴシック"/>
+                <a:ea typeface="BIZ UDPゴシック"/>
+                <a:cs typeface="BIZ UDPゴシック"/>
               </a:rPr>
               <a:t>提案3案の予測（例）</a:t>
             </a:r>
@@ -988,6 +1052,9 @@
                         <a:solidFill>
                           <a:srgbClr val="E07A10"/>
                         </a:solidFill>
+                        <a:latin typeface="BIZ UDPゴシック"/>
+                        <a:ea typeface="BIZ UDPゴシック"/>
+                        <a:cs typeface="BIZ UDPゴシック"/>
                       </a:rPr>
                       <a:t>現状（今のまま）</a:t>
                     </a:r>
@@ -1082,6 +1149,9 @@
                         <a:solidFill>
                           <a:srgbClr val="12A38A"/>
                         </a:solidFill>
+                        <a:latin typeface="BIZ UDPゴシック"/>
+                        <a:ea typeface="BIZ UDPゴシック"/>
+                        <a:cs typeface="BIZ UDPゴシック"/>
                       </a:rPr>
                       <a:t>① 楽しさキープ</a:t>
                     </a:r>
@@ -1176,6 +1246,9 @@
                         <a:solidFill>
                           <a:srgbClr val="12A38A"/>
                         </a:solidFill>
+                        <a:latin typeface="BIZ UDPゴシック"/>
+                        <a:ea typeface="BIZ UDPゴシック"/>
+                        <a:cs typeface="BIZ UDPゴシック"/>
                       </a:rPr>
                       <a:t>② バランス</a:t>
                     </a:r>
@@ -1270,6 +1343,9 @@
                         <a:solidFill>
                           <a:srgbClr val="12A38A"/>
                         </a:solidFill>
+                        <a:latin typeface="BIZ UDPゴシック"/>
+                        <a:ea typeface="BIZ UDPゴシック"/>
+                        <a:cs typeface="BIZ UDPゴシック"/>
                       </a:rPr>
                       <a:t>③ 回復重視</a:t>
                     </a:r>
@@ -1350,6 +1426,9 @@
                     <a:solidFill>
                       <a:srgbClr val="0B3C6E"/>
                     </a:solidFill>
+                    <a:latin typeface="BIZ UDPゴシック"/>
+                    <a:ea typeface="BIZ UDPゴシック"/>
+                    <a:cs typeface="BIZ UDPゴシック"/>
                   </a:rPr>
                   <a:t>推し疲れの予測（低いほど良い）</a:t>
                 </a:r>
@@ -1379,6 +1458,9 @@
                 <a:solidFill>
                   <a:srgbClr val="5A6676"/>
                 </a:solidFill>
+                <a:latin typeface="BIZ UDPゴシック"/>
+                <a:ea typeface="BIZ UDPゴシック"/>
+                <a:cs typeface="BIZ UDPゴシック"/>
               </a:defRPr>
             </a:pPr>
           </a:p>
@@ -1417,6 +1499,9 @@
                     <a:solidFill>
                       <a:srgbClr val="0B3C6E"/>
                     </a:solidFill>
+                    <a:latin typeface="BIZ UDPゴシック"/>
+                    <a:ea typeface="BIZ UDPゴシック"/>
+                    <a:cs typeface="BIZ UDPゴシック"/>
                   </a:rPr>
                   <a:t>充実の予測</a:t>
                 </a:r>
@@ -1446,6 +1531,9 @@
                 <a:solidFill>
                   <a:srgbClr val="5A6676"/>
                 </a:solidFill>
+                <a:latin typeface="BIZ UDPゴシック"/>
+                <a:ea typeface="BIZ UDPゴシック"/>
+                <a:cs typeface="BIZ UDPゴシック"/>
               </a:defRPr>
             </a:pPr>
           </a:p>
@@ -1469,9 +1557,16 @@
           <a:solidFill>
             <a:srgbClr val="5A6676"/>
           </a:solidFill>
+          <a:latin typeface="BIZ UDPゴシック"/>
+          <a:ea typeface="BIZ UDPゴシック"/>
+          <a:cs typeface="BIZ UDPゴシック"/>
         </a:defRPr>
       </a:pPr>
-      <a:endParaRPr lang="en-US"/>
+      <a:endParaRPr lang="en-US">
+        <a:latin typeface="BIZ UDPゴシック"/>
+        <a:ea typeface="BIZ UDPゴシック"/>
+        <a:cs typeface="BIZ UDPゴシック"/>
+      </a:endParaRPr>
     </a:p>
   </c:txPr>
   <c:externalData r:id="rId1">
@@ -1495,6 +1590,9 @@
                 <a:solidFill>
                   <a:srgbClr val="0B3C6E"/>
                 </a:solidFill>
+                <a:latin typeface="BIZ UDPゴシック"/>
+                <a:ea typeface="BIZ UDPゴシック"/>
+                <a:cs typeface="BIZ UDPゴシック"/>
               </a:rPr>
               <a:t>6週時点の平均絶対誤差（5段階）</a:t>
             </a:r>
@@ -1620,6 +1718,9 @@
                   <a:solidFill>
                     <a:srgbClr val="24303F"/>
                   </a:solidFill>
+                  <a:latin typeface="BIZ UDPゴシック"/>
+                  <a:ea typeface="BIZ UDPゴシック"/>
+                  <a:cs typeface="BIZ UDPゴシック"/>
                 </a:defRPr>
               </a:pPr>
             </a:p>
@@ -1664,6 +1765,9 @@
                 <a:solidFill>
                   <a:srgbClr val="24303F"/>
                 </a:solidFill>
+                <a:latin typeface="BIZ UDPゴシック"/>
+                <a:ea typeface="BIZ UDPゴシック"/>
+                <a:cs typeface="BIZ UDPゴシック"/>
               </a:defRPr>
             </a:pPr>
           </a:p>
@@ -1710,6 +1814,9 @@
                 <a:solidFill>
                   <a:srgbClr val="5A6676"/>
                 </a:solidFill>
+                <a:latin typeface="BIZ UDPゴシック"/>
+                <a:ea typeface="BIZ UDPゴシック"/>
+                <a:cs typeface="BIZ UDPゴシック"/>
               </a:defRPr>
             </a:pPr>
           </a:p>
@@ -1727,7 +1834,11 @@
         <a:lstStyle/>
         <a:p>
           <a:pPr>
-            <a:defRPr sz="1100"/>
+            <a:defRPr sz="1100">
+              <a:latin typeface="BIZ UDPゴシック"/>
+              <a:ea typeface="BIZ UDPゴシック"/>
+              <a:cs typeface="BIZ UDPゴシック"/>
+            </a:defRPr>
           </a:pPr>
         </a:p>
       </c:txPr>
@@ -1743,9 +1854,16 @@
           <a:solidFill>
             <a:srgbClr val="5A6676"/>
           </a:solidFill>
+          <a:latin typeface="BIZ UDPゴシック"/>
+          <a:ea typeface="BIZ UDPゴシック"/>
+          <a:cs typeface="BIZ UDPゴシック"/>
         </a:defRPr>
       </a:pPr>
-      <a:endParaRPr lang="en-US"/>
+      <a:endParaRPr lang="en-US">
+        <a:latin typeface="BIZ UDPゴシック"/>
+        <a:ea typeface="BIZ UDPゴシック"/>
+        <a:cs typeface="BIZ UDPゴシック"/>
+      </a:endParaRPr>
     </a:p>
   </c:txPr>
   <c:externalData r:id="rId1">
@@ -1769,6 +1887,9 @@
                 <a:solidFill>
                   <a:srgbClr val="0B3C6E"/>
                 </a:solidFill>
+                <a:latin typeface="BIZ UDPゴシック"/>
+                <a:ea typeface="BIZ UDPゴシック"/>
+                <a:cs typeface="BIZ UDPゴシック"/>
               </a:rPr>
               <a:t>選んだ提案を実行できた割合（%）</a:t>
             </a:r>
@@ -1829,6 +1950,9 @@
                     <a:solidFill>
                       <a:srgbClr val="0099FF"/>
                     </a:solidFill>
+                    <a:latin typeface="BIZ UDPゴシック"/>
+                    <a:ea typeface="BIZ UDPゴシック"/>
+                    <a:cs typeface="BIZ UDPゴシック"/>
                   </a:defRPr>
                 </a:pPr>
               </a:p>
@@ -1931,6 +2055,9 @@
                     <a:solidFill>
                       <a:srgbClr val="12A38A"/>
                     </a:solidFill>
+                    <a:latin typeface="BIZ UDPゴシック"/>
+                    <a:ea typeface="BIZ UDPゴシック"/>
+                    <a:cs typeface="BIZ UDPゴシック"/>
                   </a:defRPr>
                 </a:pPr>
               </a:p>
@@ -2018,6 +2145,9 @@
                 <a:solidFill>
                   <a:srgbClr val="24303F"/>
                 </a:solidFill>
+                <a:latin typeface="BIZ UDPゴシック"/>
+                <a:ea typeface="BIZ UDPゴシック"/>
+                <a:cs typeface="BIZ UDPゴシック"/>
               </a:defRPr>
             </a:pPr>
           </a:p>
@@ -2064,6 +2194,9 @@
                 <a:solidFill>
                   <a:srgbClr val="5A6676"/>
                 </a:solidFill>
+                <a:latin typeface="BIZ UDPゴシック"/>
+                <a:ea typeface="BIZ UDPゴシック"/>
+                <a:cs typeface="BIZ UDPゴシック"/>
               </a:defRPr>
             </a:pPr>
           </a:p>
@@ -2082,7 +2215,11 @@
         <a:lstStyle/>
         <a:p>
           <a:pPr>
-            <a:defRPr sz="1100"/>
+            <a:defRPr sz="1100">
+              <a:latin typeface="BIZ UDPゴシック"/>
+              <a:ea typeface="BIZ UDPゴシック"/>
+              <a:cs typeface="BIZ UDPゴシック"/>
+            </a:defRPr>
           </a:pPr>
         </a:p>
       </c:txPr>
@@ -2100,9 +2237,16 @@
           <a:solidFill>
             <a:srgbClr val="5A6676"/>
           </a:solidFill>
+          <a:latin typeface="BIZ UDPゴシック"/>
+          <a:ea typeface="BIZ UDPゴシック"/>
+          <a:cs typeface="BIZ UDPゴシック"/>
         </a:defRPr>
       </a:pPr>
-      <a:endParaRPr lang="en-US"/>
+      <a:endParaRPr lang="en-US">
+        <a:latin typeface="BIZ UDPゴシック"/>
+        <a:ea typeface="BIZ UDPゴシック"/>
+        <a:cs typeface="BIZ UDPゴシック"/>
+      </a:endParaRPr>
     </a:p>
   </c:txPr>
   <c:externalData r:id="rId1">
@@ -2126,6 +2270,9 @@
                 <a:solidFill>
                   <a:srgbClr val="0B3C6E"/>
                 </a:solidFill>
+                <a:latin typeface="BIZ UDPゴシック"/>
+                <a:ea typeface="BIZ UDPゴシック"/>
+                <a:cs typeface="BIZ UDPゴシック"/>
               </a:rPr>
               <a:t>WHO-5 の平均（素点 0〜25）</a:t>
             </a:r>
@@ -2189,6 +2336,9 @@
                       <a:solidFill>
                         <a:srgbClr val="8FA3B8"/>
                       </a:solidFill>
+                      <a:latin typeface="BIZ UDPゴシック"/>
+                      <a:ea typeface="BIZ UDPゴシック"/>
+                      <a:cs typeface="BIZ UDPゴシック"/>
                     </a:defRPr>
                   </a:pPr>
                 </a:p>
@@ -2301,6 +2451,9 @@
                       <a:solidFill>
                         <a:srgbClr val="0099FF"/>
                       </a:solidFill>
+                      <a:latin typeface="BIZ UDPゴシック"/>
+                      <a:ea typeface="BIZ UDPゴシック"/>
+                      <a:cs typeface="BIZ UDPゴシック"/>
                     </a:defRPr>
                   </a:pPr>
                 </a:p>
@@ -2413,6 +2566,9 @@
                       <a:solidFill>
                         <a:srgbClr val="12A38A"/>
                       </a:solidFill>
+                      <a:latin typeface="BIZ UDPゴシック"/>
+                      <a:ea typeface="BIZ UDPゴシック"/>
+                      <a:cs typeface="BIZ UDPゴシック"/>
                     </a:defRPr>
                   </a:pPr>
                 </a:p>
@@ -2507,6 +2663,9 @@
                 <a:solidFill>
                   <a:srgbClr val="24303F"/>
                 </a:solidFill>
+                <a:latin typeface="BIZ UDPゴシック"/>
+                <a:ea typeface="BIZ UDPゴシック"/>
+                <a:cs typeface="BIZ UDPゴシック"/>
               </a:defRPr>
             </a:pPr>
           </a:p>
@@ -2553,6 +2712,9 @@
                 <a:solidFill>
                   <a:srgbClr val="5A6676"/>
                 </a:solidFill>
+                <a:latin typeface="BIZ UDPゴシック"/>
+                <a:ea typeface="BIZ UDPゴシック"/>
+                <a:cs typeface="BIZ UDPゴシック"/>
               </a:defRPr>
             </a:pPr>
           </a:p>
@@ -2571,7 +2733,11 @@
         <a:lstStyle/>
         <a:p>
           <a:pPr>
-            <a:defRPr sz="1100"/>
+            <a:defRPr sz="1100">
+              <a:latin typeface="BIZ UDPゴシック"/>
+              <a:ea typeface="BIZ UDPゴシック"/>
+              <a:cs typeface="BIZ UDPゴシック"/>
+            </a:defRPr>
           </a:pPr>
         </a:p>
       </c:txPr>
@@ -2589,9 +2755,16 @@
           <a:solidFill>
             <a:srgbClr val="5A6676"/>
           </a:solidFill>
+          <a:latin typeface="BIZ UDPゴシック"/>
+          <a:ea typeface="BIZ UDPゴシック"/>
+          <a:cs typeface="BIZ UDPゴシック"/>
         </a:defRPr>
       </a:pPr>
-      <a:endParaRPr lang="en-US"/>
+      <a:endParaRPr lang="en-US">
+        <a:latin typeface="BIZ UDPゴシック"/>
+        <a:ea typeface="BIZ UDPゴシック"/>
+        <a:cs typeface="BIZ UDPゴシック"/>
+      </a:endParaRPr>
     </a:p>
   </c:txPr>
   <c:externalData r:id="rId1">
@@ -2615,6 +2788,9 @@
                 <a:solidFill>
                   <a:srgbClr val="0B3C6E"/>
                 </a:solidFill>
+                <a:latin typeface="BIZ UDPゴシック"/>
+                <a:ea typeface="BIZ UDPゴシック"/>
+                <a:cs typeface="BIZ UDPゴシック"/>
               </a:rPr>
               <a:t>疲れの中身の変化（2→6週）</a:t>
             </a:r>
@@ -2846,6 +3022,9 @@
                 <a:solidFill>
                   <a:srgbClr val="24303F"/>
                 </a:solidFill>
+                <a:latin typeface="BIZ UDPゴシック"/>
+                <a:ea typeface="BIZ UDPゴシック"/>
+                <a:cs typeface="BIZ UDPゴシック"/>
               </a:defRPr>
             </a:pPr>
           </a:p>
@@ -2892,6 +3071,9 @@
                 <a:solidFill>
                   <a:srgbClr val="5A6676"/>
                 </a:solidFill>
+                <a:latin typeface="BIZ UDPゴシック"/>
+                <a:ea typeface="BIZ UDPゴシック"/>
+                <a:cs typeface="BIZ UDPゴシック"/>
               </a:defRPr>
             </a:pPr>
           </a:p>
@@ -2909,7 +3091,11 @@
         <a:lstStyle/>
         <a:p>
           <a:pPr>
-            <a:defRPr sz="1100"/>
+            <a:defRPr sz="1100">
+              <a:latin typeface="BIZ UDPゴシック"/>
+              <a:ea typeface="BIZ UDPゴシック"/>
+              <a:cs typeface="BIZ UDPゴシック"/>
+            </a:defRPr>
           </a:pPr>
         </a:p>
       </c:txPr>
@@ -2925,9 +3111,16 @@
           <a:solidFill>
             <a:srgbClr val="5A6676"/>
           </a:solidFill>
+          <a:latin typeface="BIZ UDPゴシック"/>
+          <a:ea typeface="BIZ UDPゴシック"/>
+          <a:cs typeface="BIZ UDPゴシック"/>
         </a:defRPr>
       </a:pPr>
-      <a:endParaRPr lang="en-US"/>
+      <a:endParaRPr lang="en-US">
+        <a:latin typeface="BIZ UDPゴシック"/>
+        <a:ea typeface="BIZ UDPゴシック"/>
+        <a:cs typeface="BIZ UDPゴシック"/>
+      </a:endParaRPr>
     </a:p>
   </c:txPr>
   <c:externalData r:id="rId1">
@@ -2951,6 +3144,9 @@
                 <a:solidFill>
                   <a:srgbClr val="0B3C6E"/>
                 </a:solidFill>
+                <a:latin typeface="BIZ UDPゴシック"/>
+                <a:ea typeface="BIZ UDPゴシック"/>
+                <a:cs typeface="BIZ UDPゴシック"/>
               </a:rPr>
               <a:t>週ごとの記録率（%）</a:t>
             </a:r>
@@ -3014,6 +3210,9 @@
                       <a:solidFill>
                         <a:srgbClr val="8FA3B8"/>
                       </a:solidFill>
+                      <a:latin typeface="BIZ UDPゴシック"/>
+                      <a:ea typeface="BIZ UDPゴシック"/>
+                      <a:cs typeface="BIZ UDPゴシック"/>
                     </a:defRPr>
                   </a:pPr>
                 </a:p>
@@ -3138,6 +3337,9 @@
                       <a:solidFill>
                         <a:srgbClr val="0099FF"/>
                       </a:solidFill>
+                      <a:latin typeface="BIZ UDPゴシック"/>
+                      <a:ea typeface="BIZ UDPゴシック"/>
+                      <a:cs typeface="BIZ UDPゴシック"/>
                     </a:defRPr>
                   </a:pPr>
                 </a:p>
@@ -3262,6 +3464,9 @@
                       <a:solidFill>
                         <a:srgbClr val="12A38A"/>
                       </a:solidFill>
+                      <a:latin typeface="BIZ UDPゴシック"/>
+                      <a:ea typeface="BIZ UDPゴシック"/>
+                      <a:cs typeface="BIZ UDPゴシック"/>
                     </a:defRPr>
                   </a:pPr>
                 </a:p>
@@ -3368,6 +3573,9 @@
                 <a:solidFill>
                   <a:srgbClr val="24303F"/>
                 </a:solidFill>
+                <a:latin typeface="BIZ UDPゴシック"/>
+                <a:ea typeface="BIZ UDPゴシック"/>
+                <a:cs typeface="BIZ UDPゴシック"/>
               </a:defRPr>
             </a:pPr>
           </a:p>
@@ -3414,6 +3622,9 @@
                 <a:solidFill>
                   <a:srgbClr val="5A6676"/>
                 </a:solidFill>
+                <a:latin typeface="BIZ UDPゴシック"/>
+                <a:ea typeface="BIZ UDPゴシック"/>
+                <a:cs typeface="BIZ UDPゴシック"/>
               </a:defRPr>
             </a:pPr>
           </a:p>
@@ -3432,7 +3643,11 @@
         <a:lstStyle/>
         <a:p>
           <a:pPr>
-            <a:defRPr sz="1100"/>
+            <a:defRPr sz="1100">
+              <a:latin typeface="BIZ UDPゴシック"/>
+              <a:ea typeface="BIZ UDPゴシック"/>
+              <a:cs typeface="BIZ UDPゴシック"/>
+            </a:defRPr>
           </a:pPr>
         </a:p>
       </c:txPr>
@@ -3450,9 +3665,16 @@
           <a:solidFill>
             <a:srgbClr val="5A6676"/>
           </a:solidFill>
+          <a:latin typeface="BIZ UDPゴシック"/>
+          <a:ea typeface="BIZ UDPゴシック"/>
+          <a:cs typeface="BIZ UDPゴシック"/>
         </a:defRPr>
       </a:pPr>
-      <a:endParaRPr lang="en-US"/>
+      <a:endParaRPr lang="en-US">
+        <a:latin typeface="BIZ UDPゴシック"/>
+        <a:ea typeface="BIZ UDPゴシック"/>
+        <a:cs typeface="BIZ UDPゴシック"/>
+      </a:endParaRPr>
     </a:p>
   </c:txPr>
   <c:externalData r:id="rId1">
@@ -8059,7 +8281,7 @@
         <p:spPr>
           <a:xfrm>
             <a:off x="0" y="855796"/>
-            <a:ext cx="5115503" cy="300082"/>
+            <a:ext cx="6200000" cy="300082"/>
           </a:xfrm>
           <a:prstGeom prst="rect">
             <a:avLst/>
@@ -8512,6 +8734,9 @@
                 <a:solidFill>
                   <a:srgbClr val="24303F"/>
                 </a:solidFill>
+                <a:latin typeface="BIZ UDPゴシック"/>
+                <a:ea typeface="BIZ UDPゴシック"/>
+                <a:cs typeface="BIZ UDPゴシック"/>
               </a:rPr>
               <a:t>OshiFit：個人の性格特性に適した推し活を提案し</a:t>
             </a:r>
@@ -8528,6 +8753,9 @@
                 <a:solidFill>
                   <a:srgbClr val="24303F"/>
                 </a:solidFill>
+                <a:latin typeface="BIZ UDPゴシック"/>
+                <a:ea typeface="BIZ UDPゴシック"/>
+                <a:cs typeface="BIZ UDPゴシック"/>
               </a:rPr>
               <a:t>ウェルビーイングを向上させるシステムの構築と検証</a:t>
             </a:r>
@@ -8562,6 +8790,9 @@
                 <a:solidFill>
                   <a:srgbClr val="24303F"/>
                 </a:solidFill>
+                <a:latin typeface="BIZ UDPゴシック"/>
+                <a:ea typeface="BIZ UDPゴシック"/>
+                <a:cs typeface="BIZ UDPゴシック"/>
               </a:rPr>
               <a:t>今井元</a:t>
             </a:r>
@@ -8603,6 +8834,9 @@
                 <a:solidFill>
                   <a:srgbClr val="24303F"/>
                 </a:solidFill>
+                <a:latin typeface="BIZ UDPゴシック"/>
+                <a:ea typeface="BIZ UDPゴシック"/>
+                <a:cs typeface="BIZ UDPゴシック"/>
               </a:rPr>
               <a:t>2026年度 修士論文公聴会</a:t>
             </a:r>
@@ -8642,6 +8876,9 @@
                 <a:solidFill>
                   <a:srgbClr val="24303F"/>
                 </a:solidFill>
+                <a:latin typeface="BIZ UDPゴシック"/>
+                <a:ea typeface="BIZ UDPゴシック"/>
+                <a:cs typeface="BIZ UDPゴシック"/>
               </a:rPr>
               <a:t>大阪工業大学大学院</a:t>
             </a:r>
@@ -8658,6 +8895,9 @@
                 <a:solidFill>
                   <a:srgbClr val="24303F"/>
                 </a:solidFill>
+                <a:latin typeface="BIZ UDPゴシック"/>
+                <a:ea typeface="BIZ UDPゴシック"/>
+                <a:cs typeface="BIZ UDPゴシック"/>
               </a:rPr>
               <a:t>メディアインタラクション研究室</a:t>
             </a:r>
@@ -8674,6 +8914,9 @@
                 <a:solidFill>
                   <a:srgbClr val="24303F"/>
                 </a:solidFill>
+                <a:latin typeface="BIZ UDPゴシック"/>
+                <a:ea typeface="BIZ UDPゴシック"/>
+                <a:cs typeface="BIZ UDPゴシック"/>
               </a:rPr>
               <a:t>指導教員：大井 翔</a:t>
             </a:r>
@@ -8716,6 +8959,9 @@
                 <a:solidFill>
                   <a:srgbClr val="FFFFFF"/>
                 </a:solidFill>
+                <a:latin typeface="BIZ UDPゴシック"/>
+                <a:ea typeface="BIZ UDPゴシック"/>
+                <a:cs typeface="BIZ UDPゴシック"/>
               </a:rPr>
               <a:t>2027年2月17日</a:t>
             </a:r>
@@ -8792,6 +9038,9 @@
                 <a:solidFill>
                   <a:srgbClr val="24303F"/>
                 </a:solidFill>
+                <a:latin typeface="BIZ UDPゴシック"/>
+                <a:ea typeface="BIZ UDPゴシック"/>
+                <a:cs typeface="BIZ UDPゴシック"/>
               </a:rPr>
               <a:t>① ベイズ個人ツイン</a:t>
             </a:r>
@@ -8810,9 +9059,14 @@
         </p:nvSpPr>
         <p:spPr/>
         <p:txBody>
-          <a:bodyPr/>
-          <a:p>
-            <a:r>
+          <a:bodyPr lIns="27432" rIns="0" wrap="none"/>
+          <a:p>
+            <a:r>
+              <a:rPr sz="900">
+                <a:latin typeface="BIZ UDPゴシック"/>
+                <a:ea typeface="BIZ UDPゴシック"/>
+                <a:cs typeface="BIZ UDPゴシック"/>
+              </a:rPr>
               <a:t>2027/2/17</a:t>
             </a:r>
           </a:p>
@@ -8833,7 +9087,11 @@
           <a:bodyPr/>
           <a:p>
             <a:fld id="{B6F15528-21DE-4FAA-801E-634DDDAF4B2B}" type="slidenum">
-              <a:rPr lang="en-US"/>
+              <a:rPr lang="en-US">
+                <a:latin typeface="BIZ UDPゴシック"/>
+                <a:ea typeface="BIZ UDPゴシック"/>
+                <a:cs typeface="BIZ UDPゴシック"/>
+              </a:rPr>
               <a:t>10</a:t>
             </a:fld>
           </a:p>
@@ -8868,7 +9126,7 @@
               <a:buClr>
                 <a:srgbClr val="0099FF"/>
               </a:buClr>
-              <a:buFont typeface="Arial"/>
+              <a:buFont typeface="BIZ UDPゴシック"/>
               <a:buChar char="•"/>
             </a:pPr>
             <a:r>
@@ -8876,6 +9134,9 @@
                 <a:solidFill>
                   <a:srgbClr val="24303F"/>
                 </a:solidFill>
+                <a:latin typeface="BIZ UDPゴシック"/>
+                <a:ea typeface="BIZ UDPゴシック"/>
+                <a:cs typeface="BIZ UDPゴシック"/>
               </a:rPr>
               <a:t>予備調査215名の係数を出発点（事前分布）にする</a:t>
             </a:r>
@@ -8888,7 +9149,7 @@
               <a:buClr>
                 <a:srgbClr val="0099FF"/>
               </a:buClr>
-              <a:buFont typeface="Arial"/>
+              <a:buFont typeface="BIZ UDPゴシック"/>
               <a:buChar char="•"/>
             </a:pPr>
             <a:r>
@@ -8896,6 +9157,9 @@
                 <a:solidFill>
                   <a:srgbClr val="24303F"/>
                 </a:solidFill>
+                <a:latin typeface="BIZ UDPゴシック"/>
+                <a:ea typeface="BIZ UDPゴシック"/>
+                <a:cs typeface="BIZ UDPゴシック"/>
               </a:rPr>
               <a:t>毎日の記録で、その人の個人差を毎晩更新する</a:t>
             </a:r>
@@ -8908,7 +9172,7 @@
               <a:buClr>
                 <a:srgbClr val="0099FF"/>
               </a:buClr>
-              <a:buFont typeface="Arial"/>
+              <a:buFont typeface="BIZ UDPゴシック"/>
               <a:buChar char="•"/>
             </a:pPr>
             <a:r>
@@ -8916,6 +9180,9 @@
                 <a:solidFill>
                   <a:srgbClr val="24303F"/>
                 </a:solidFill>
+                <a:latin typeface="BIZ UDPゴシック"/>
+                <a:ea typeface="BIZ UDPゴシック"/>
+                <a:cs typeface="BIZ UDPゴシック"/>
               </a:rPr>
               <a:t>予測は分布として出るので、予測区間が自然に得られる</a:t>
             </a:r>
@@ -8928,7 +9195,7 @@
               <a:buClr>
                 <a:srgbClr val="0099FF"/>
               </a:buClr>
-              <a:buFont typeface="Arial"/>
+              <a:buFont typeface="BIZ UDPゴシック"/>
               <a:buChar char="•"/>
             </a:pPr>
             <a:r>
@@ -8936,6 +9203,9 @@
                 <a:solidFill>
                   <a:srgbClr val="24303F"/>
                 </a:solidFill>
+                <a:latin typeface="BIZ UDPゴシック"/>
+                <a:ea typeface="BIZ UDPゴシック"/>
+                <a:cs typeface="BIZ UDPゴシック"/>
               </a:rPr>
               <a:t>端末内で計算でき、サーバーには記録の数値だけを送る</a:t>
             </a:r>
@@ -9019,8 +9289,11 @@
                 <a:solidFill>
                   <a:srgbClr val="FFFFFF"/>
                 </a:solidFill>
-              </a:rPr>
-              <a:t>予測 = (全体の傾向 β + 個人差 bᵢ) × 行動</a:t>
+                <a:latin typeface="BIZ UDPゴシック"/>
+                <a:ea typeface="BIZ UDPゴシック"/>
+                <a:cs typeface="BIZ UDPゴシック"/>
+              </a:rPr>
+              <a:t>予測 = (全体の傾向 + 個人差) × 行動</a:t>
             </a:r>
           </a:p>
           <a:p>
@@ -9035,8 +9308,11 @@
                 <a:solidFill>
                   <a:srgbClr val="CCE9FF"/>
                 </a:solidFill>
-              </a:rPr>
-              <a:t>bᵢ ～ N(0, τ²)：記録が増えるほど本人寄りに</a:t>
+                <a:latin typeface="BIZ UDPゴシック"/>
+                <a:ea typeface="BIZ UDPゴシック"/>
+                <a:cs typeface="BIZ UDPゴシック"/>
+              </a:rPr>
+              <a:t>個人差は平均0の正規分布から。記録が増えるほど本人寄りに</a:t>
             </a:r>
           </a:p>
         </p:txBody>
@@ -9096,6 +9372,9 @@
                 <a:solidFill>
                   <a:srgbClr val="0B3C6E"/>
                 </a:solidFill>
+                <a:latin typeface="BIZ UDPゴシック"/>
+                <a:ea typeface="BIZ UDPゴシック"/>
+                <a:cs typeface="BIZ UDPゴシック"/>
               </a:rPr>
               <a:t>14日の記録で、推し疲れの80%予測区間は ±1.18 → ±0.86</a:t>
             </a:r>
@@ -9177,6 +9456,9 @@
                 <a:solidFill>
                   <a:srgbClr val="E8457C"/>
                 </a:solidFill>
+                <a:latin typeface="BIZ UDPゴシック"/>
+                <a:ea typeface="BIZ UDPゴシック"/>
+                <a:cs typeface="BIZ UDPゴシック"/>
               </a:rPr>
               <a:t>※ 想定値：実データで差し替え</a:t>
             </a:r>
@@ -9229,6 +9511,9 @@
                 <a:solidFill>
                   <a:srgbClr val="24303F"/>
                 </a:solidFill>
+                <a:latin typeface="BIZ UDPゴシック"/>
+                <a:ea typeface="BIZ UDPゴシック"/>
+                <a:cs typeface="BIZ UDPゴシック"/>
               </a:rPr>
               <a:t>② リバランス提案：減らさずに組み替える</a:t>
             </a:r>
@@ -9247,9 +9532,14 @@
         </p:nvSpPr>
         <p:spPr/>
         <p:txBody>
-          <a:bodyPr/>
-          <a:p>
-            <a:r>
+          <a:bodyPr lIns="27432" rIns="0" wrap="none"/>
+          <a:p>
+            <a:r>
+              <a:rPr sz="900">
+                <a:latin typeface="BIZ UDPゴシック"/>
+                <a:ea typeface="BIZ UDPゴシック"/>
+                <a:cs typeface="BIZ UDPゴシック"/>
+              </a:rPr>
               <a:t>2027/2/17</a:t>
             </a:r>
           </a:p>
@@ -9270,7 +9560,11 @@
           <a:bodyPr/>
           <a:p>
             <a:fld id="{B6F15528-21DE-4FAA-801E-634DDDAF4B2B}" type="slidenum">
-              <a:rPr lang="en-US"/>
+              <a:rPr lang="en-US">
+                <a:latin typeface="BIZ UDPゴシック"/>
+                <a:ea typeface="BIZ UDPゴシック"/>
+                <a:cs typeface="BIZ UDPゴシック"/>
+              </a:rPr>
               <a:t>11</a:t>
             </a:fld>
           </a:p>
@@ -9327,6 +9621,9 @@
                 <a:solidFill>
                   <a:srgbClr val="5A6676"/>
                 </a:solidFill>
+                <a:latin typeface="BIZ UDPゴシック"/>
+                <a:ea typeface="BIZ UDPゴシック"/>
+                <a:cs typeface="BIZ UDPゴシック"/>
               </a:rPr>
               <a:t>7つの活動を最大2つまで±1段階動かした98案から、本人の希望を守るパレート最適な3案を選ぶ</a:t>
             </a:r>
@@ -9374,6 +9671,9 @@
                           <a:solidFill>
                             <a:srgbClr val="FFFFFF"/>
                           </a:solidFill>
+                          <a:latin typeface="BIZ UDPゴシック"/>
+                          <a:ea typeface="BIZ UDPゴシック"/>
+                          <a:cs typeface="BIZ UDPゴシック"/>
                         </a:rPr>
                         <a:t>案</a:t>
                       </a:r>
@@ -9423,6 +9723,9 @@
                           <a:solidFill>
                             <a:srgbClr val="FFFFFF"/>
                           </a:solidFill>
+                          <a:latin typeface="BIZ UDPゴシック"/>
+                          <a:ea typeface="BIZ UDPゴシック"/>
+                          <a:cs typeface="BIZ UDPゴシック"/>
                         </a:rPr>
                         <a:t>内容</a:t>
                       </a:r>
@@ -9474,6 +9777,9 @@
                           <a:solidFill>
                             <a:srgbClr val="24303F"/>
                           </a:solidFill>
+                          <a:latin typeface="BIZ UDPゴシック"/>
+                          <a:ea typeface="BIZ UDPゴシック"/>
+                          <a:cs typeface="BIZ UDPゴシック"/>
                         </a:rPr>
                         <a:t>① 楽しさキープ</a:t>
                       </a:r>
@@ -9523,6 +9829,9 @@
                           <a:solidFill>
                             <a:srgbClr val="24303F"/>
                           </a:solidFill>
+                          <a:latin typeface="BIZ UDPゴシック"/>
+                          <a:ea typeface="BIZ UDPゴシック"/>
+                          <a:cs typeface="BIZ UDPゴシック"/>
                         </a:rPr>
                         <a:t>夜のSNSを1時間短く、配信は週末にまとめて</a:t>
                       </a:r>
@@ -9574,6 +9883,9 @@
                           <a:solidFill>
                             <a:srgbClr val="24303F"/>
                           </a:solidFill>
+                          <a:latin typeface="BIZ UDPゴシック"/>
+                          <a:ea typeface="BIZ UDPゴシック"/>
+                          <a:cs typeface="BIZ UDPゴシック"/>
                         </a:rPr>
                         <a:t>② バランス</a:t>
                       </a:r>
@@ -9623,6 +9935,9 @@
                           <a:solidFill>
                             <a:srgbClr val="24303F"/>
                           </a:solidFill>
+                          <a:latin typeface="BIZ UDPゴシック"/>
+                          <a:ea typeface="BIZ UDPゴシック"/>
+                          <a:cs typeface="BIZ UDPゴシック"/>
                         </a:rPr>
                         <a:t>グッズは月1回のまとめ買い。浮いた分をライブへ</a:t>
                       </a:r>
@@ -9674,6 +9989,9 @@
                           <a:solidFill>
                             <a:srgbClr val="24303F"/>
                           </a:solidFill>
+                          <a:latin typeface="BIZ UDPゴシック"/>
+                          <a:ea typeface="BIZ UDPゴシック"/>
+                          <a:cs typeface="BIZ UDPゴシック"/>
                         </a:rPr>
                         <a:t>③ 回復重視</a:t>
                       </a:r>
@@ -9723,6 +10041,9 @@
                           <a:solidFill>
                             <a:srgbClr val="24303F"/>
                           </a:solidFill>
+                          <a:latin typeface="BIZ UDPゴシック"/>
+                          <a:ea typeface="BIZ UDPゴシック"/>
+                          <a:cs typeface="BIZ UDPゴシック"/>
                         </a:rPr>
                         <a:t>24時以降はSNSオフ、睡眠を1時間ふやす</a:t>
                       </a:r>
@@ -9836,6 +10157,9 @@
                 <a:solidFill>
                   <a:srgbClr val="12A38A"/>
                 </a:solidFill>
+                <a:latin typeface="BIZ UDPゴシック"/>
+                <a:ea typeface="BIZ UDPゴシック"/>
+                <a:cs typeface="BIZ UDPゴシック"/>
               </a:rPr>
               <a:t>選ぶのは本人</a:t>
             </a:r>
@@ -9852,6 +10176,9 @@
                 <a:solidFill>
                   <a:srgbClr val="24303F"/>
                 </a:solidFill>
+                <a:latin typeface="BIZ UDPゴシック"/>
+                <a:ea typeface="BIZ UDPゴシック"/>
+                <a:cs typeface="BIZ UDPゴシック"/>
               </a:rPr>
               <a:t>「増やしたい」活動は減らさない。どの案も選ばない自由も残す</a:t>
             </a:r>
@@ -9904,6 +10231,9 @@
                 <a:solidFill>
                   <a:srgbClr val="24303F"/>
                 </a:solidFill>
+                <a:latin typeface="BIZ UDPゴシック"/>
+                <a:ea typeface="BIZ UDPゴシック"/>
+                <a:cs typeface="BIZ UDPゴシック"/>
               </a:rPr>
               <a:t>③ ゆらぎアバター（みらいミラー）</a:t>
             </a:r>
@@ -9922,9 +10252,14 @@
         </p:nvSpPr>
         <p:spPr/>
         <p:txBody>
-          <a:bodyPr/>
-          <a:p>
-            <a:r>
+          <a:bodyPr lIns="27432" rIns="0" wrap="none"/>
+          <a:p>
+            <a:r>
+              <a:rPr sz="900">
+                <a:latin typeface="BIZ UDPゴシック"/>
+                <a:ea typeface="BIZ UDPゴシック"/>
+                <a:cs typeface="BIZ UDPゴシック"/>
+              </a:rPr>
               <a:t>2027/2/17</a:t>
             </a:r>
           </a:p>
@@ -9945,7 +10280,11 @@
           <a:bodyPr/>
           <a:p>
             <a:fld id="{B6F15528-21DE-4FAA-801E-634DDDAF4B2B}" type="slidenum">
-              <a:rPr lang="en-US"/>
+              <a:rPr lang="en-US">
+                <a:latin typeface="BIZ UDPゴシック"/>
+                <a:ea typeface="BIZ UDPゴシック"/>
+                <a:cs typeface="BIZ UDPゴシック"/>
+              </a:rPr>
               <a:t>12</a:t>
             </a:fld>
           </a:p>
@@ -10076,6 +10415,9 @@
                 <a:solidFill>
                   <a:srgbClr val="0B3C6E"/>
                 </a:solidFill>
+                <a:latin typeface="BIZ UDPゴシック"/>
+                <a:ea typeface="BIZ UDPゴシック"/>
+                <a:cs typeface="BIZ UDPゴシック"/>
               </a:rPr>
               <a:t>記録0日</a:t>
             </a:r>
@@ -10183,6 +10525,9 @@
                 <a:solidFill>
                   <a:srgbClr val="0B3C6E"/>
                 </a:solidFill>
+                <a:latin typeface="BIZ UDPゴシック"/>
+                <a:ea typeface="BIZ UDPゴシック"/>
+                <a:cs typeface="BIZ UDPゴシック"/>
               </a:rPr>
               <a:t>7日</a:t>
             </a:r>
@@ -10290,6 +10635,9 @@
                 <a:solidFill>
                   <a:srgbClr val="12A38A"/>
                 </a:solidFill>
+                <a:latin typeface="BIZ UDPゴシック"/>
+                <a:ea typeface="BIZ UDPゴシック"/>
+                <a:cs typeface="BIZ UDPゴシック"/>
               </a:rPr>
               <a:t>14日</a:t>
             </a:r>
@@ -10325,7 +10673,7 @@
               <a:buClr>
                 <a:srgbClr val="0099FF"/>
               </a:buClr>
-              <a:buFont typeface="Arial"/>
+              <a:buFont typeface="BIZ UDPゴシック"/>
               <a:buChar char="•"/>
             </a:pPr>
             <a:r>
@@ -10333,6 +10681,9 @@
                 <a:solidFill>
                   <a:srgbClr val="24303F"/>
                 </a:solidFill>
+                <a:latin typeface="BIZ UDPゴシック"/>
+                <a:ea typeface="BIZ UDPゴシック"/>
+                <a:cs typeface="BIZ UDPゴシック"/>
               </a:rPr>
               <a:t>今のまま（Path A）と提案どおり（Path B）を並べて表示</a:t>
             </a:r>
@@ -10345,7 +10696,7 @@
               <a:buClr>
                 <a:srgbClr val="0099FF"/>
               </a:buClr>
-              <a:buFont typeface="Arial"/>
+              <a:buFont typeface="BIZ UDPゴシック"/>
               <a:buChar char="•"/>
             </a:pPr>
             <a:r>
@@ -10353,6 +10704,9 @@
                 <a:solidFill>
                   <a:srgbClr val="24303F"/>
                 </a:solidFill>
+                <a:latin typeface="BIZ UDPゴシック"/>
+                <a:ea typeface="BIZ UDPゴシック"/>
+                <a:cs typeface="BIZ UDPゴシック"/>
               </a:rPr>
               <a:t>予測分布から20通りの未来を引き、5体のアバターを重ねて描く。濃さ＝起こりやすさ</a:t>
             </a:r>
@@ -10365,7 +10719,7 @@
               <a:buClr>
                 <a:srgbClr val="0099FF"/>
               </a:buClr>
-              <a:buFont typeface="Arial"/>
+              <a:buFont typeface="BIZ UDPゴシック"/>
               <a:buChar char="•"/>
             </a:pPr>
             <a:r>
@@ -10373,6 +10727,9 @@
                 <a:solidFill>
                   <a:srgbClr val="24303F"/>
                 </a:solidFill>
+                <a:latin typeface="BIZ UDPゴシック"/>
+                <a:ea typeface="BIZ UDPゴシック"/>
+                <a:cs typeface="BIZ UDPゴシック"/>
               </a:rPr>
               <a:t>「20人中◯人が疲れ高め」の点の表示（Kay et al., 2016）</a:t>
             </a:r>
@@ -10385,7 +10742,7 @@
               <a:buClr>
                 <a:srgbClr val="E8457C"/>
               </a:buClr>
-              <a:buFont typeface="Arial"/>
+              <a:buFont typeface="BIZ UDPゴシック"/>
               <a:buChar char="•"/>
             </a:pPr>
             <a:r>
@@ -10393,6 +10750,9 @@
                 <a:solidFill>
                   <a:srgbClr val="24303F"/>
                 </a:solidFill>
+                <a:latin typeface="BIZ UDPゴシック"/>
+                <a:ea typeface="BIZ UDPゴシック"/>
+                <a:cs typeface="BIZ UDPゴシック"/>
               </a:rPr>
               <a:t>記録が増えると重なりが収束：「未来の解像度」が上がる</a:t>
             </a:r>
@@ -10405,7 +10765,7 @@
               <a:buClr>
                 <a:srgbClr val="0099FF"/>
               </a:buClr>
-              <a:buFont typeface="Arial"/>
+              <a:buFont typeface="BIZ UDPゴシック"/>
               <a:buChar char="•"/>
             </a:pPr>
             <a:r>
@@ -10413,6 +10773,9 @@
                 <a:solidFill>
                   <a:srgbClr val="24303F"/>
                 </a:solidFill>
+                <a:latin typeface="BIZ UDPゴシック"/>
+                <a:ea typeface="BIZ UDPゴシック"/>
+                <a:cs typeface="BIZ UDPゴシック"/>
               </a:rPr>
               <a:t>表情は予測の区分（3段階）にだけ連動させ、誇張しない</a:t>
             </a:r>
@@ -10465,6 +10828,9 @@
                 <a:solidFill>
                   <a:srgbClr val="24303F"/>
                 </a:solidFill>
+                <a:latin typeface="BIZ UDPゴシック"/>
+                <a:ea typeface="BIZ UDPゴシック"/>
+                <a:cs typeface="BIZ UDPゴシック"/>
               </a:rPr>
               <a:t>実験：6週間・3群の無作為化比較実験</a:t>
             </a:r>
@@ -10483,9 +10849,14 @@
         </p:nvSpPr>
         <p:spPr/>
         <p:txBody>
-          <a:bodyPr/>
-          <a:p>
-            <a:r>
+          <a:bodyPr lIns="27432" rIns="0" wrap="none"/>
+          <a:p>
+            <a:r>
+              <a:rPr sz="900">
+                <a:latin typeface="BIZ UDPゴシック"/>
+                <a:ea typeface="BIZ UDPゴシック"/>
+                <a:cs typeface="BIZ UDPゴシック"/>
+              </a:rPr>
               <a:t>2027/2/17</a:t>
             </a:r>
           </a:p>
@@ -10506,7 +10877,11 @@
           <a:bodyPr/>
           <a:p>
             <a:fld id="{B6F15528-21DE-4FAA-801E-634DDDAF4B2B}" type="slidenum">
-              <a:rPr lang="en-US"/>
+              <a:rPr lang="en-US">
+                <a:latin typeface="BIZ UDPゴシック"/>
+                <a:ea typeface="BIZ UDPゴシック"/>
+                <a:cs typeface="BIZ UDPゴシック"/>
+              </a:rPr>
               <a:t>13</a:t>
             </a:fld>
           </a:p>
@@ -10545,6 +10920,9 @@
                 <a:solidFill>
                   <a:srgbClr val="5A6676"/>
                 </a:solidFill>
+                <a:latin typeface="BIZ UDPゴシック"/>
+                <a:ea typeface="BIZ UDPゴシック"/>
+                <a:cs typeface="BIZ UDPゴシック"/>
               </a:rPr>
               <a:t>1週</a:t>
             </a:r>
@@ -10584,6 +10962,9 @@
                 <a:solidFill>
                   <a:srgbClr val="5A6676"/>
                 </a:solidFill>
+                <a:latin typeface="BIZ UDPゴシック"/>
+                <a:ea typeface="BIZ UDPゴシック"/>
+                <a:cs typeface="BIZ UDPゴシック"/>
               </a:rPr>
               <a:t>2週</a:t>
             </a:r>
@@ -10623,6 +11004,9 @@
                 <a:solidFill>
                   <a:srgbClr val="5A6676"/>
                 </a:solidFill>
+                <a:latin typeface="BIZ UDPゴシック"/>
+                <a:ea typeface="BIZ UDPゴシック"/>
+                <a:cs typeface="BIZ UDPゴシック"/>
               </a:rPr>
               <a:t>3週</a:t>
             </a:r>
@@ -10662,6 +11046,9 @@
                 <a:solidFill>
                   <a:srgbClr val="5A6676"/>
                 </a:solidFill>
+                <a:latin typeface="BIZ UDPゴシック"/>
+                <a:ea typeface="BIZ UDPゴシック"/>
+                <a:cs typeface="BIZ UDPゴシック"/>
               </a:rPr>
               <a:t>4週</a:t>
             </a:r>
@@ -10701,6 +11088,9 @@
                 <a:solidFill>
                   <a:srgbClr val="5A6676"/>
                 </a:solidFill>
+                <a:latin typeface="BIZ UDPゴシック"/>
+                <a:ea typeface="BIZ UDPゴシック"/>
+                <a:cs typeface="BIZ UDPゴシック"/>
               </a:rPr>
               <a:t>5週</a:t>
             </a:r>
@@ -10740,6 +11130,9 @@
                 <a:solidFill>
                   <a:srgbClr val="5A6676"/>
                 </a:solidFill>
+                <a:latin typeface="BIZ UDPゴシック"/>
+                <a:ea typeface="BIZ UDPゴシック"/>
+                <a:cs typeface="BIZ UDPゴシック"/>
               </a:rPr>
               <a:t>6週</a:t>
             </a:r>
@@ -10779,6 +11172,9 @@
                 <a:solidFill>
                   <a:srgbClr val="7A8594"/>
                 </a:solidFill>
+                <a:latin typeface="BIZ UDPゴシック"/>
+                <a:ea typeface="BIZ UDPゴシック"/>
+                <a:cs typeface="BIZ UDPゴシック"/>
               </a:rPr>
               <a:t>群A 記録のみ</a:t>
             </a:r>
@@ -10840,6 +11236,9 @@
                 <a:solidFill>
                   <a:srgbClr val="5A6676"/>
                 </a:solidFill>
+                <a:latin typeface="BIZ UDPゴシック"/>
+                <a:ea typeface="BIZ UDPゴシック"/>
+                <a:cs typeface="BIZ UDPゴシック"/>
               </a:rPr>
               <a:t>記録のみ</a:t>
             </a:r>
@@ -10903,6 +11302,9 @@
                 <a:solidFill>
                   <a:srgbClr val="0B3C6E"/>
                 </a:solidFill>
+                <a:latin typeface="BIZ UDPゴシック"/>
+                <a:ea typeface="BIZ UDPゴシック"/>
+                <a:cs typeface="BIZ UDPゴシック"/>
               </a:rPr>
               <a:t>記録のみ</a:t>
             </a:r>
@@ -10942,6 +11344,9 @@
                 <a:solidFill>
                   <a:srgbClr val="0099FF"/>
                 </a:solidFill>
+                <a:latin typeface="BIZ UDPゴシック"/>
+                <a:ea typeface="BIZ UDPゴシック"/>
+                <a:cs typeface="BIZ UDPゴシック"/>
               </a:rPr>
               <a:t>群B 提案（文章）</a:t>
             </a:r>
@@ -11003,6 +11408,9 @@
                 <a:solidFill>
                   <a:srgbClr val="5A6676"/>
                 </a:solidFill>
+                <a:latin typeface="BIZ UDPゴシック"/>
+                <a:ea typeface="BIZ UDPゴシック"/>
+                <a:cs typeface="BIZ UDPゴシック"/>
               </a:rPr>
               <a:t>記録のみ</a:t>
             </a:r>
@@ -11066,6 +11474,9 @@
                 <a:solidFill>
                   <a:srgbClr val="0B3C6E"/>
                 </a:solidFill>
+                <a:latin typeface="BIZ UDPゴシック"/>
+                <a:ea typeface="BIZ UDPゴシック"/>
+                <a:cs typeface="BIZ UDPゴシック"/>
               </a:rPr>
               <a:t>提案（文章）＋記録</a:t>
             </a:r>
@@ -11105,6 +11516,9 @@
                 <a:solidFill>
                   <a:srgbClr val="12A38A"/>
                 </a:solidFill>
+                <a:latin typeface="BIZ UDPゴシック"/>
+                <a:ea typeface="BIZ UDPゴシック"/>
+                <a:cs typeface="BIZ UDPゴシック"/>
               </a:rPr>
               <a:t>群C 提案＋アバター</a:t>
             </a:r>
@@ -11166,6 +11580,9 @@
                 <a:solidFill>
                   <a:srgbClr val="5A6676"/>
                 </a:solidFill>
+                <a:latin typeface="BIZ UDPゴシック"/>
+                <a:ea typeface="BIZ UDPゴシック"/>
+                <a:cs typeface="BIZ UDPゴシック"/>
               </a:rPr>
               <a:t>記録のみ</a:t>
             </a:r>
@@ -11229,6 +11646,9 @@
                 <a:solidFill>
                   <a:srgbClr val="0B3C6E"/>
                 </a:solidFill>
+                <a:latin typeface="BIZ UDPゴシック"/>
+                <a:ea typeface="BIZ UDPゴシック"/>
+                <a:cs typeface="BIZ UDPゴシック"/>
               </a:rPr>
               <a:t>提案＋予測アバター＋記録</a:t>
             </a:r>
@@ -11326,6 +11746,9 @@
                 <a:solidFill>
                   <a:srgbClr val="FFFFFF"/>
                 </a:solidFill>
+                <a:latin typeface="BIZ UDPゴシック"/>
+                <a:ea typeface="BIZ UDPゴシック"/>
+                <a:cs typeface="BIZ UDPゴシック"/>
               </a:rPr>
               <a:t>2週の終わりに層別割付</a:t>
             </a:r>
@@ -11533,6 +11956,9 @@
                 <a:solidFill>
                   <a:srgbClr val="0B3C6E"/>
                 </a:solidFill>
+                <a:latin typeface="BIZ UDPゴシック"/>
+                <a:ea typeface="BIZ UDPゴシック"/>
+                <a:cs typeface="BIZ UDPゴシック"/>
               </a:rPr>
               <a:t>WHO-5</a:t>
             </a:r>
@@ -11615,6 +12041,9 @@
                           <a:solidFill>
                             <a:srgbClr val="FFFFFF"/>
                           </a:solidFill>
+                          <a:latin typeface="BIZ UDPゴシック"/>
+                          <a:ea typeface="BIZ UDPゴシック"/>
+                          <a:cs typeface="BIZ UDPゴシック"/>
                         </a:rPr>
                         <a:t>評価</a:t>
                       </a:r>
@@ -11664,6 +12093,9 @@
                           <a:solidFill>
                             <a:srgbClr val="FFFFFF"/>
                           </a:solidFill>
+                          <a:latin typeface="BIZ UDPゴシック"/>
+                          <a:ea typeface="BIZ UDPゴシック"/>
+                          <a:cs typeface="BIZ UDPゴシック"/>
                         </a:rPr>
                         <a:t>内容</a:t>
                       </a:r>
@@ -11715,6 +12147,9 @@
                           <a:solidFill>
                             <a:srgbClr val="24303F"/>
                           </a:solidFill>
+                          <a:latin typeface="BIZ UDPゴシック"/>
+                          <a:ea typeface="BIZ UDPゴシック"/>
+                          <a:cs typeface="BIZ UDPゴシック"/>
                         </a:rPr>
                         <a:t>主要（RQ3）</a:t>
                       </a:r>
@@ -11764,6 +12199,9 @@
                           <a:solidFill>
                             <a:srgbClr val="24303F"/>
                           </a:solidFill>
+                          <a:latin typeface="BIZ UDPゴシック"/>
+                          <a:ea typeface="BIZ UDPゴシック"/>
+                          <a:cs typeface="BIZ UDPゴシック"/>
                         </a:rPr>
                         <a:t>6週時点の WHO-5（2週の得点を共変量とする共分散分析、Holm 法）</a:t>
                       </a:r>
@@ -11815,6 +12253,9 @@
                           <a:solidFill>
                             <a:srgbClr val="24303F"/>
                           </a:solidFill>
+                          <a:latin typeface="BIZ UDPゴシック"/>
+                          <a:ea typeface="BIZ UDPゴシック"/>
+                          <a:cs typeface="BIZ UDPゴシック"/>
                         </a:rPr>
                         <a:t>RQ2・RQ1</a:t>
                       </a:r>
@@ -11864,6 +12305,9 @@
                           <a:solidFill>
                             <a:srgbClr val="24303F"/>
                           </a:solidFill>
+                          <a:latin typeface="BIZ UDPゴシック"/>
+                          <a:ea typeface="BIZ UDPゴシック"/>
+                          <a:cs typeface="BIZ UDPゴシック"/>
                         </a:rPr>
                         <a:t>毎週の提案の実行（ロジスティック混合モデル）／6週時点の予測と実測のずれ</a:t>
                       </a:r>
@@ -11946,6 +12390,9 @@
                 <a:solidFill>
                   <a:srgbClr val="24303F"/>
                 </a:solidFill>
+                <a:latin typeface="BIZ UDPゴシック"/>
+                <a:ea typeface="BIZ UDPゴシック"/>
+                <a:cs typeface="BIZ UDPゴシック"/>
               </a:rPr>
               <a:t>参加者</a:t>
             </a:r>
@@ -11964,9 +12411,14 @@
         </p:nvSpPr>
         <p:spPr/>
         <p:txBody>
-          <a:bodyPr/>
-          <a:p>
-            <a:r>
+          <a:bodyPr lIns="27432" rIns="0" wrap="none"/>
+          <a:p>
+            <a:r>
+              <a:rPr sz="900">
+                <a:latin typeface="BIZ UDPゴシック"/>
+                <a:ea typeface="BIZ UDPゴシック"/>
+                <a:cs typeface="BIZ UDPゴシック"/>
+              </a:rPr>
               <a:t>2027/2/17</a:t>
             </a:r>
           </a:p>
@@ -11987,7 +12439,11 @@
           <a:bodyPr/>
           <a:p>
             <a:fld id="{B6F15528-21DE-4FAA-801E-634DDDAF4B2B}" type="slidenum">
-              <a:rPr lang="en-US"/>
+              <a:rPr lang="en-US">
+                <a:latin typeface="BIZ UDPゴシック"/>
+                <a:ea typeface="BIZ UDPゴシック"/>
+                <a:cs typeface="BIZ UDPゴシック"/>
+              </a:rPr>
               <a:t>14</a:t>
             </a:fld>
           </a:p>
@@ -12070,6 +12526,9 @@
                 <a:solidFill>
                   <a:srgbClr val="0B3C6E"/>
                 </a:solidFill>
+                <a:latin typeface="BIZ UDPゴシック"/>
+                <a:ea typeface="BIZ UDPゴシック"/>
+                <a:cs typeface="BIZ UDPゴシック"/>
               </a:rPr>
               <a:t>応募</a:t>
             </a:r>
@@ -12109,6 +12568,9 @@
                 <a:solidFill>
                   <a:srgbClr val="0B3C6E"/>
                 </a:solidFill>
+                <a:latin typeface="BIZ UDPゴシック"/>
+                <a:ea typeface="BIZ UDPゴシック"/>
+                <a:cs typeface="BIZ UDPゴシック"/>
               </a:rPr>
               <a:t>241名</a:t>
             </a:r>
@@ -12234,6 +12696,9 @@
                 <a:solidFill>
                   <a:srgbClr val="0B3C6E"/>
                 </a:solidFill>
+                <a:latin typeface="BIZ UDPゴシック"/>
+                <a:ea typeface="BIZ UDPゴシック"/>
+                <a:cs typeface="BIZ UDPゴシック"/>
               </a:rPr>
               <a:t>開始</a:t>
             </a:r>
@@ -12273,6 +12738,9 @@
                 <a:solidFill>
                   <a:srgbClr val="0B3C6E"/>
                 </a:solidFill>
+                <a:latin typeface="BIZ UDPゴシック"/>
+                <a:ea typeface="BIZ UDPゴシック"/>
+                <a:cs typeface="BIZ UDPゴシック"/>
               </a:rPr>
               <a:t>228名</a:t>
             </a:r>
@@ -12398,6 +12866,9 @@
                 <a:solidFill>
                   <a:srgbClr val="0B3C6E"/>
                 </a:solidFill>
+                <a:latin typeface="BIZ UDPゴシック"/>
+                <a:ea typeface="BIZ UDPゴシック"/>
+                <a:cs typeface="BIZ UDPゴシック"/>
               </a:rPr>
               <a:t>割付</a:t>
             </a:r>
@@ -12437,6 +12908,9 @@
                 <a:solidFill>
                   <a:srgbClr val="0B3C6E"/>
                 </a:solidFill>
+                <a:latin typeface="BIZ UDPゴシック"/>
+                <a:ea typeface="BIZ UDPゴシック"/>
+                <a:cs typeface="BIZ UDPゴシック"/>
               </a:rPr>
               <a:t>213名</a:t>
             </a:r>
@@ -12562,6 +13036,9 @@
                 <a:solidFill>
                   <a:srgbClr val="FFFFFF"/>
                 </a:solidFill>
+                <a:latin typeface="BIZ UDPゴシック"/>
+                <a:ea typeface="BIZ UDPゴシック"/>
+                <a:cs typeface="BIZ UDPゴシック"/>
               </a:rPr>
               <a:t>6週完了</a:t>
             </a:r>
@@ -12601,6 +13078,9 @@
                 <a:solidFill>
                   <a:srgbClr val="FFFFFF"/>
                 </a:solidFill>
+                <a:latin typeface="BIZ UDPゴシック"/>
+                <a:ea typeface="BIZ UDPゴシック"/>
+                <a:cs typeface="BIZ UDPゴシック"/>
               </a:rPr>
               <a:t>197名</a:t>
             </a:r>
@@ -12684,6 +13164,9 @@
                 <a:solidFill>
                   <a:srgbClr val="7A8594"/>
                 </a:solidFill>
+                <a:latin typeface="BIZ UDPゴシック"/>
+                <a:ea typeface="BIZ UDPゴシック"/>
+                <a:cs typeface="BIZ UDPゴシック"/>
               </a:rPr>
               <a:t>群A 記録のみ</a:t>
             </a:r>
@@ -12723,6 +13206,9 @@
                 <a:solidFill>
                   <a:srgbClr val="0B3C6E"/>
                 </a:solidFill>
+                <a:latin typeface="BIZ UDPゴシック"/>
+                <a:ea typeface="BIZ UDPゴシック"/>
+                <a:cs typeface="BIZ UDPゴシック"/>
               </a:rPr>
               <a:t>64名</a:t>
             </a:r>
@@ -12762,6 +13248,9 @@
                 <a:solidFill>
                   <a:srgbClr val="5A6676"/>
                 </a:solidFill>
+                <a:latin typeface="BIZ UDPゴシック"/>
+                <a:ea typeface="BIZ UDPゴシック"/>
+                <a:cs typeface="BIZ UDPゴシック"/>
               </a:rPr>
               <a:t>割付 71名 → 完了 64名</a:t>
             </a:r>
@@ -12845,6 +13334,9 @@
                 <a:solidFill>
                   <a:srgbClr val="0099FF"/>
                 </a:solidFill>
+                <a:latin typeface="BIZ UDPゴシック"/>
+                <a:ea typeface="BIZ UDPゴシック"/>
+                <a:cs typeface="BIZ UDPゴシック"/>
               </a:rPr>
               <a:t>群B 提案（文章）</a:t>
             </a:r>
@@ -12884,6 +13376,9 @@
                 <a:solidFill>
                   <a:srgbClr val="0B3C6E"/>
                 </a:solidFill>
+                <a:latin typeface="BIZ UDPゴシック"/>
+                <a:ea typeface="BIZ UDPゴシック"/>
+                <a:cs typeface="BIZ UDPゴシック"/>
               </a:rPr>
               <a:t>66名</a:t>
             </a:r>
@@ -12923,6 +13418,9 @@
                 <a:solidFill>
                   <a:srgbClr val="5A6676"/>
                 </a:solidFill>
+                <a:latin typeface="BIZ UDPゴシック"/>
+                <a:ea typeface="BIZ UDPゴシック"/>
+                <a:cs typeface="BIZ UDPゴシック"/>
               </a:rPr>
               <a:t>割付 71名 → 完了 66名</a:t>
             </a:r>
@@ -13006,6 +13504,9 @@
                 <a:solidFill>
                   <a:srgbClr val="12A38A"/>
                 </a:solidFill>
+                <a:latin typeface="BIZ UDPゴシック"/>
+                <a:ea typeface="BIZ UDPゴシック"/>
+                <a:cs typeface="BIZ UDPゴシック"/>
               </a:rPr>
               <a:t>群C 提案＋アバター</a:t>
             </a:r>
@@ -13045,6 +13546,9 @@
                 <a:solidFill>
                   <a:srgbClr val="0B3C6E"/>
                 </a:solidFill>
+                <a:latin typeface="BIZ UDPゴシック"/>
+                <a:ea typeface="BIZ UDPゴシック"/>
+                <a:cs typeface="BIZ UDPゴシック"/>
               </a:rPr>
               <a:t>67名</a:t>
             </a:r>
@@ -13084,6 +13588,9 @@
                 <a:solidFill>
                   <a:srgbClr val="5A6676"/>
                 </a:solidFill>
+                <a:latin typeface="BIZ UDPゴシック"/>
+                <a:ea typeface="BIZ UDPゴシック"/>
+                <a:cs typeface="BIZ UDPゴシック"/>
               </a:rPr>
               <a:t>割付 71名 → 完了 67名</a:t>
             </a:r>
@@ -13167,6 +13674,9 @@
                 <a:solidFill>
                   <a:srgbClr val="0B3C6E"/>
                 </a:solidFill>
+                <a:latin typeface="BIZ UDPゴシック"/>
+                <a:ea typeface="BIZ UDPゴシック"/>
+                <a:cs typeface="BIZ UDPゴシック"/>
               </a:rPr>
               <a:t>平均年齢 22.6歳、女性 約7割。推し活をしている成人（大学生が中心）</a:t>
             </a:r>
@@ -13183,6 +13693,9 @@
                 <a:solidFill>
                   <a:srgbClr val="24303F"/>
                 </a:solidFill>
+                <a:latin typeface="BIZ UDPゴシック"/>
+                <a:ea typeface="BIZ UDPゴシック"/>
+                <a:cs typeface="BIZ UDPゴシック"/>
               </a:rPr>
               <a:t>各群とも必要人数（1群64名：d = 0.5、検出力80%）を確保。割付時の WHO-5 などに群間の偏りなし</a:t>
             </a:r>
@@ -13246,6 +13759,9 @@
                 <a:solidFill>
                   <a:srgbClr val="E8457C"/>
                 </a:solidFill>
+                <a:latin typeface="BIZ UDPゴシック"/>
+                <a:ea typeface="BIZ UDPゴシック"/>
+                <a:cs typeface="BIZ UDPゴシック"/>
               </a:rPr>
               <a:t>※ 想定値：実データで差し替え</a:t>
             </a:r>
@@ -13298,6 +13814,9 @@
                 <a:solidFill>
                   <a:srgbClr val="24303F"/>
                 </a:solidFill>
+                <a:latin typeface="BIZ UDPゴシック"/>
+                <a:ea typeface="BIZ UDPゴシック"/>
+                <a:cs typeface="BIZ UDPゴシック"/>
               </a:rPr>
               <a:t>結果 RQ1：個人補正で予測の誤差が減った</a:t>
             </a:r>
@@ -13316,9 +13835,14 @@
         </p:nvSpPr>
         <p:spPr/>
         <p:txBody>
-          <a:bodyPr/>
-          <a:p>
-            <a:r>
+          <a:bodyPr lIns="27432" rIns="0" wrap="none"/>
+          <a:p>
+            <a:r>
+              <a:rPr sz="900">
+                <a:latin typeface="BIZ UDPゴシック"/>
+                <a:ea typeface="BIZ UDPゴシック"/>
+                <a:cs typeface="BIZ UDPゴシック"/>
+              </a:rPr>
               <a:t>2027/2/17</a:t>
             </a:r>
           </a:p>
@@ -13339,7 +13863,11 @@
           <a:bodyPr/>
           <a:p>
             <a:fld id="{B6F15528-21DE-4FAA-801E-634DDDAF4B2B}" type="slidenum">
-              <a:rPr lang="en-US"/>
+              <a:rPr lang="en-US">
+                <a:latin typeface="BIZ UDPゴシック"/>
+                <a:ea typeface="BIZ UDPゴシック"/>
+                <a:cs typeface="BIZ UDPゴシック"/>
+              </a:rPr>
               <a:t>15</a:t>
             </a:fld>
           </a:p>
@@ -13396,6 +13924,9 @@
                 <a:solidFill>
                   <a:srgbClr val="5A6676"/>
                 </a:solidFill>
+                <a:latin typeface="BIZ UDPゴシック"/>
+                <a:ea typeface="BIZ UDPゴシック"/>
+                <a:cs typeface="BIZ UDPゴシック"/>
               </a:rPr>
               <a:t>予測は2週時点の記録までで作成し、6週時点の実測と比べた</a:t>
             </a:r>
@@ -13487,6 +14018,9 @@
                 <a:solidFill>
                   <a:srgbClr val="12A38A"/>
                 </a:solidFill>
+                <a:latin typeface="BIZ UDPゴシック"/>
+                <a:ea typeface="BIZ UDPゴシック"/>
+                <a:cs typeface="BIZ UDPゴシック"/>
               </a:rPr>
               <a:t>−26%</a:t>
             </a:r>
@@ -13526,6 +14060,9 @@
                 <a:solidFill>
                   <a:srgbClr val="5A6676"/>
                 </a:solidFill>
+                <a:latin typeface="BIZ UDPゴシック"/>
+                <a:ea typeface="BIZ UDPゴシック"/>
+                <a:cs typeface="BIZ UDPゴシック"/>
               </a:rPr>
               <a:t>推し疲れの誤差の減少</a:t>
             </a:r>
@@ -13617,6 +14154,9 @@
                 <a:solidFill>
                   <a:srgbClr val="12A38A"/>
                 </a:solidFill>
+                <a:latin typeface="BIZ UDPゴシック"/>
+                <a:ea typeface="BIZ UDPゴシック"/>
+                <a:cs typeface="BIZ UDPゴシック"/>
               </a:rPr>
               <a:t>76%</a:t>
             </a:r>
@@ -13656,6 +14196,9 @@
                 <a:solidFill>
                   <a:srgbClr val="5A6676"/>
                 </a:solidFill>
+                <a:latin typeface="BIZ UDPゴシック"/>
+                <a:ea typeface="BIZ UDPゴシック"/>
+                <a:cs typeface="BIZ UDPゴシック"/>
               </a:rPr>
               <a:t>80%区間に入った割合（推し疲れ）</a:t>
             </a:r>
@@ -13739,6 +14282,9 @@
                 <a:solidFill>
                   <a:srgbClr val="0B3C6E"/>
                 </a:solidFill>
+                <a:latin typeface="BIZ UDPゴシック"/>
+                <a:ea typeface="BIZ UDPゴシック"/>
+                <a:cs typeface="BIZ UDPゴシック"/>
               </a:rPr>
               <a:t>予測区間はおおむね正直</a:t>
             </a:r>
@@ -13755,6 +14301,9 @@
                 <a:solidFill>
                   <a:srgbClr val="24303F"/>
                 </a:solidFill>
+                <a:latin typeface="BIZ UDPゴシック"/>
+                <a:ea typeface="BIZ UDPゴシック"/>
+                <a:cs typeface="BIZ UDPゴシック"/>
               </a:rPr>
               <a:t>ゆらぎアバターが示す幅は、実際の外れ方とほぼ一致した</a:t>
             </a:r>
@@ -13818,6 +14367,9 @@
                 <a:solidFill>
                   <a:srgbClr val="E8457C"/>
                 </a:solidFill>
+                <a:latin typeface="BIZ UDPゴシック"/>
+                <a:ea typeface="BIZ UDPゴシック"/>
+                <a:cs typeface="BIZ UDPゴシック"/>
               </a:rPr>
               <a:t>※ 想定値：実データで差し替え</a:t>
             </a:r>
@@ -13870,6 +14422,9 @@
                 <a:solidFill>
                   <a:srgbClr val="24303F"/>
                 </a:solidFill>
+                <a:latin typeface="BIZ UDPゴシック"/>
+                <a:ea typeface="BIZ UDPゴシック"/>
+                <a:cs typeface="BIZ UDPゴシック"/>
               </a:rPr>
               <a:t>結果 RQ2：提案の実行が増えた</a:t>
             </a:r>
@@ -13888,9 +14443,14 @@
         </p:nvSpPr>
         <p:spPr/>
         <p:txBody>
-          <a:bodyPr/>
-          <a:p>
-            <a:r>
+          <a:bodyPr lIns="27432" rIns="0" wrap="none"/>
+          <a:p>
+            <a:r>
+              <a:rPr sz="900">
+                <a:latin typeface="BIZ UDPゴシック"/>
+                <a:ea typeface="BIZ UDPゴシック"/>
+                <a:cs typeface="BIZ UDPゴシック"/>
+              </a:rPr>
               <a:t>2027/2/17</a:t>
             </a:r>
           </a:p>
@@ -13911,7 +14471,11 @@
           <a:bodyPr/>
           <a:p>
             <a:fld id="{B6F15528-21DE-4FAA-801E-634DDDAF4B2B}" type="slidenum">
-              <a:rPr lang="en-US"/>
+              <a:rPr lang="en-US">
+                <a:latin typeface="BIZ UDPゴシック"/>
+                <a:ea typeface="BIZ UDPゴシック"/>
+                <a:cs typeface="BIZ UDPゴシック"/>
+              </a:rPr>
               <a:t>16</a:t>
             </a:fld>
           </a:p>
@@ -14012,6 +14576,9 @@
                 <a:solidFill>
                   <a:srgbClr val="12A38A"/>
                 </a:solidFill>
+                <a:latin typeface="BIZ UDPゴシック"/>
+                <a:ea typeface="BIZ UDPゴシック"/>
+                <a:cs typeface="BIZ UDPゴシック"/>
               </a:rPr>
               <a:t>OR = 1.71</a:t>
             </a:r>
@@ -14028,6 +14595,9 @@
                 <a:solidFill>
                   <a:srgbClr val="24303F"/>
                 </a:solidFill>
+                <a:latin typeface="BIZ UDPゴシック"/>
+                <a:ea typeface="BIZ UDPゴシック"/>
+                <a:cs typeface="BIZ UDPゴシック"/>
               </a:rPr>
               <a:t>95%CI 1.18〜2.48</a:t>
             </a:r>
@@ -14044,6 +14614,9 @@
                 <a:solidFill>
                   <a:srgbClr val="24303F"/>
                 </a:solidFill>
+                <a:latin typeface="BIZ UDPゴシック"/>
+                <a:ea typeface="BIZ UDPゴシック"/>
+                <a:cs typeface="BIZ UDPゴシック"/>
               </a:rPr>
               <a:t>p = .005</a:t>
             </a:r>
@@ -14060,6 +14633,9 @@
                 <a:solidFill>
                   <a:srgbClr val="5A6676"/>
                 </a:solidFill>
+                <a:latin typeface="BIZ UDPゴシック"/>
+                <a:ea typeface="BIZ UDPゴシック"/>
+                <a:cs typeface="BIZ UDPゴシック"/>
               </a:rPr>
               <a:t>ロジスティック混合モデル</a:t>
             </a:r>
@@ -14143,6 +14719,9 @@
                 <a:solidFill>
                   <a:srgbClr val="0B3C6E"/>
                 </a:solidFill>
+                <a:latin typeface="BIZ UDPゴシック"/>
+                <a:ea typeface="BIZ UDPゴシック"/>
+                <a:cs typeface="BIZ UDPゴシック"/>
               </a:rPr>
               <a:t>同じ提案でも、見せ方で実行が変わる</a:t>
             </a:r>
@@ -14159,6 +14738,9 @@
                 <a:solidFill>
                   <a:srgbClr val="24303F"/>
                 </a:solidFill>
+                <a:latin typeface="BIZ UDPゴシック"/>
+                <a:ea typeface="BIZ UDPゴシック"/>
+                <a:cs typeface="BIZ UDPゴシック"/>
               </a:rPr>
               <a:t>群Cは週を追っても下がり方がゆるやかで、6週でも57%が実行</a:t>
             </a:r>
@@ -14222,6 +14804,9 @@
                 <a:solidFill>
                   <a:srgbClr val="E8457C"/>
                 </a:solidFill>
+                <a:latin typeface="BIZ UDPゴシック"/>
+                <a:ea typeface="BIZ UDPゴシック"/>
+                <a:cs typeface="BIZ UDPゴシック"/>
               </a:rPr>
               <a:t>※ 想定値：実データで差し替え</a:t>
             </a:r>
@@ -14274,6 +14859,9 @@
                 <a:solidFill>
                   <a:srgbClr val="24303F"/>
                 </a:solidFill>
+                <a:latin typeface="BIZ UDPゴシック"/>
+                <a:ea typeface="BIZ UDPゴシック"/>
+                <a:cs typeface="BIZ UDPゴシック"/>
               </a:rPr>
               <a:t>結果 RQ3：WHO-5 の変化</a:t>
             </a:r>
@@ -14292,9 +14880,14 @@
         </p:nvSpPr>
         <p:spPr/>
         <p:txBody>
-          <a:bodyPr/>
-          <a:p>
-            <a:r>
+          <a:bodyPr lIns="27432" rIns="0" wrap="none"/>
+          <a:p>
+            <a:r>
+              <a:rPr sz="900">
+                <a:latin typeface="BIZ UDPゴシック"/>
+                <a:ea typeface="BIZ UDPゴシック"/>
+                <a:cs typeface="BIZ UDPゴシック"/>
+              </a:rPr>
               <a:t>2027/2/17</a:t>
             </a:r>
           </a:p>
@@ -14315,7 +14908,11 @@
           <a:bodyPr/>
           <a:p>
             <a:fld id="{B6F15528-21DE-4FAA-801E-634DDDAF4B2B}" type="slidenum">
-              <a:rPr lang="en-US"/>
+              <a:rPr lang="en-US">
+                <a:latin typeface="BIZ UDPゴシック"/>
+                <a:ea typeface="BIZ UDPゴシック"/>
+                <a:cs typeface="BIZ UDPゴシック"/>
+              </a:rPr>
               <a:t>17</a:t>
             </a:fld>
           </a:p>
@@ -14382,6 +14979,9 @@
                           <a:solidFill>
                             <a:srgbClr val="FFFFFF"/>
                           </a:solidFill>
+                          <a:latin typeface="BIZ UDPゴシック"/>
+                          <a:ea typeface="BIZ UDPゴシック"/>
+                          <a:cs typeface="BIZ UDPゴシック"/>
                         </a:rPr>
                         <a:t>比較</a:t>
                       </a:r>
@@ -14431,6 +15031,9 @@
                           <a:solidFill>
                             <a:srgbClr val="FFFFFF"/>
                           </a:solidFill>
+                          <a:latin typeface="BIZ UDPゴシック"/>
+                          <a:ea typeface="BIZ UDPゴシック"/>
+                          <a:cs typeface="BIZ UDPゴシック"/>
                         </a:rPr>
                         <a:t>調整済みの差</a:t>
                       </a:r>
@@ -14480,6 +15083,9 @@
                           <a:solidFill>
                             <a:srgbClr val="FFFFFF"/>
                           </a:solidFill>
+                          <a:latin typeface="BIZ UDPゴシック"/>
+                          <a:ea typeface="BIZ UDPゴシック"/>
+                          <a:cs typeface="BIZ UDPゴシック"/>
                         </a:rPr>
                         <a:t>95%信頼区間</a:t>
                       </a:r>
@@ -14529,6 +15135,9 @@
                           <a:solidFill>
                             <a:srgbClr val="FFFFFF"/>
                           </a:solidFill>
+                          <a:latin typeface="BIZ UDPゴシック"/>
+                          <a:ea typeface="BIZ UDPゴシック"/>
+                          <a:cs typeface="BIZ UDPゴシック"/>
                         </a:rPr>
                         <a:t>p（Holm 補正後）</a:t>
                       </a:r>
@@ -14580,6 +15189,9 @@
                           <a:solidFill>
                             <a:srgbClr val="24303F"/>
                           </a:solidFill>
+                          <a:latin typeface="BIZ UDPゴシック"/>
+                          <a:ea typeface="BIZ UDPゴシック"/>
+                          <a:cs typeface="BIZ UDPゴシック"/>
                         </a:rPr>
                         <a:t>C − B（主要）</a:t>
                       </a:r>
@@ -14629,6 +15241,9 @@
                           <a:solidFill>
                             <a:srgbClr val="24303F"/>
                           </a:solidFill>
+                          <a:latin typeface="BIZ UDPゴシック"/>
+                          <a:ea typeface="BIZ UDPゴシック"/>
+                          <a:cs typeface="BIZ UDPゴシック"/>
                         </a:rPr>
                         <a:t>+0.9</a:t>
                       </a:r>
@@ -14678,6 +15293,9 @@
                           <a:solidFill>
                             <a:srgbClr val="24303F"/>
                           </a:solidFill>
+                          <a:latin typeface="BIZ UDPゴシック"/>
+                          <a:ea typeface="BIZ UDPゴシック"/>
+                          <a:cs typeface="BIZ UDPゴシック"/>
                         </a:rPr>
                         <a:t>−0.1 〜 +1.9</a:t>
                       </a:r>
@@ -14727,6 +15345,9 @@
                           <a:solidFill>
                             <a:srgbClr val="24303F"/>
                           </a:solidFill>
+                          <a:latin typeface="BIZ UDPゴシック"/>
+                          <a:ea typeface="BIZ UDPゴシック"/>
+                          <a:cs typeface="BIZ UDPゴシック"/>
                         </a:rPr>
                         <a:t>.08（.16）</a:t>
                       </a:r>
@@ -14778,6 +15399,9 @@
                           <a:solidFill>
                             <a:srgbClr val="24303F"/>
                           </a:solidFill>
+                          <a:latin typeface="BIZ UDPゴシック"/>
+                          <a:ea typeface="BIZ UDPゴシック"/>
+                          <a:cs typeface="BIZ UDPゴシック"/>
                         </a:rPr>
                         <a:t>B − A（主要）</a:t>
                       </a:r>
@@ -14827,6 +15451,9 @@
                           <a:solidFill>
                             <a:srgbClr val="24303F"/>
                           </a:solidFill>
+                          <a:latin typeface="BIZ UDPゴシック"/>
+                          <a:ea typeface="BIZ UDPゴシック"/>
+                          <a:cs typeface="BIZ UDPゴシック"/>
                         </a:rPr>
                         <a:t>+0.8</a:t>
                       </a:r>
@@ -14876,6 +15503,9 @@
                           <a:solidFill>
                             <a:srgbClr val="24303F"/>
                           </a:solidFill>
+                          <a:latin typeface="BIZ UDPゴシック"/>
+                          <a:ea typeface="BIZ UDPゴシック"/>
+                          <a:cs typeface="BIZ UDPゴシック"/>
                         </a:rPr>
                         <a:t>−0.2 〜 +1.8</a:t>
                       </a:r>
@@ -14925,6 +15555,9 @@
                           <a:solidFill>
                             <a:srgbClr val="24303F"/>
                           </a:solidFill>
+                          <a:latin typeface="BIZ UDPゴシック"/>
+                          <a:ea typeface="BIZ UDPゴシック"/>
+                          <a:cs typeface="BIZ UDPゴシック"/>
                         </a:rPr>
                         <a:t>.12（.16）</a:t>
                       </a:r>
@@ -14976,6 +15609,9 @@
                           <a:solidFill>
                             <a:srgbClr val="24303F"/>
                           </a:solidFill>
+                          <a:latin typeface="BIZ UDPゴシック"/>
+                          <a:ea typeface="BIZ UDPゴシック"/>
+                          <a:cs typeface="BIZ UDPゴシック"/>
                         </a:rPr>
                         <a:t>C − A（探索的）</a:t>
                       </a:r>
@@ -15025,6 +15661,9 @@
                           <a:solidFill>
                             <a:srgbClr val="24303F"/>
                           </a:solidFill>
+                          <a:latin typeface="BIZ UDPゴシック"/>
+                          <a:ea typeface="BIZ UDPゴシック"/>
+                          <a:cs typeface="BIZ UDPゴシック"/>
                         </a:rPr>
                         <a:t>+1.7</a:t>
                       </a:r>
@@ -15074,6 +15713,9 @@
                           <a:solidFill>
                             <a:srgbClr val="24303F"/>
                           </a:solidFill>
+                          <a:latin typeface="BIZ UDPゴシック"/>
+                          <a:ea typeface="BIZ UDPゴシック"/>
+                          <a:cs typeface="BIZ UDPゴシック"/>
                         </a:rPr>
                         <a:t>+0.7 〜 +2.7</a:t>
                       </a:r>
@@ -15123,6 +15765,9 @@
                           <a:solidFill>
                             <a:srgbClr val="24303F"/>
                           </a:solidFill>
+                          <a:latin typeface="BIZ UDPゴシック"/>
+                          <a:ea typeface="BIZ UDPゴシック"/>
+                          <a:cs typeface="BIZ UDPゴシック"/>
                         </a:rPr>
                         <a:t>.001</a:t>
                       </a:r>
@@ -15192,6 +15837,9 @@
                 <a:solidFill>
                   <a:srgbClr val="5A6676"/>
                 </a:solidFill>
+                <a:latin typeface="BIZ UDPゴシック"/>
+                <a:ea typeface="BIZ UDPゴシック"/>
+                <a:cs typeface="BIZ UDPゴシック"/>
               </a:rPr>
               <a:t>共分散分析（2週の WHO-5 を共変量）</a:t>
             </a:r>
@@ -15275,6 +15923,9 @@
                 <a:solidFill>
                   <a:srgbClr val="E07A10"/>
                 </a:solidFill>
+                <a:latin typeface="BIZ UDPゴシック"/>
+                <a:ea typeface="BIZ UDPゴシック"/>
+                <a:cs typeface="BIZ UDPゴシック"/>
               </a:rPr>
               <a:t>主要な比較では有意差なし</a:t>
             </a:r>
@@ -15287,7 +15938,7 @@
               <a:buClr>
                 <a:srgbClr val="E07A10"/>
               </a:buClr>
-              <a:buFont typeface="Arial"/>
+              <a:buFont typeface="BIZ UDPゴシック"/>
               <a:buChar char="•"/>
             </a:pPr>
             <a:r>
@@ -15295,6 +15946,9 @@
                 <a:solidFill>
                   <a:srgbClr val="24303F"/>
                 </a:solidFill>
+                <a:latin typeface="BIZ UDPゴシック"/>
+                <a:ea typeface="BIZ UDPゴシック"/>
+                <a:cs typeface="BIZ UDPゴシック"/>
               </a:rPr>
               <a:t>群Cは記録のみの群Aより +1.7 点（探索的）</a:t>
             </a:r>
@@ -15307,7 +15961,7 @@
               <a:buClr>
                 <a:srgbClr val="E07A10"/>
               </a:buClr>
-              <a:buFont typeface="Arial"/>
+              <a:buFont typeface="BIZ UDPゴシック"/>
               <a:buChar char="•"/>
             </a:pPr>
             <a:r>
@@ -15315,6 +15969,9 @@
                 <a:solidFill>
                   <a:srgbClr val="24303F"/>
                 </a:solidFill>
+                <a:latin typeface="BIZ UDPゴシック"/>
+                <a:ea typeface="BIZ UDPゴシック"/>
+                <a:cs typeface="BIZ UDPゴシック"/>
               </a:rPr>
               <a:t>群C−群B は d ≈ 0.2。中程度の差を想定した人数では検出力が不足</a:t>
             </a:r>
@@ -15378,6 +16035,9 @@
                 <a:solidFill>
                   <a:srgbClr val="E8457C"/>
                 </a:solidFill>
+                <a:latin typeface="BIZ UDPゴシック"/>
+                <a:ea typeface="BIZ UDPゴシック"/>
+                <a:cs typeface="BIZ UDPゴシック"/>
               </a:rPr>
               <a:t>※ 想定値：実データで差し替え</a:t>
             </a:r>
@@ -15430,6 +16090,9 @@
                 <a:solidFill>
                   <a:srgbClr val="24303F"/>
                 </a:solidFill>
+                <a:latin typeface="BIZ UDPゴシック"/>
+                <a:ea typeface="BIZ UDPゴシック"/>
+                <a:cs typeface="BIZ UDPゴシック"/>
               </a:rPr>
               <a:t>副次的な結果：疲れの中身・楽しさ・記録</a:t>
             </a:r>
@@ -15448,9 +16111,14 @@
         </p:nvSpPr>
         <p:spPr/>
         <p:txBody>
-          <a:bodyPr/>
-          <a:p>
-            <a:r>
+          <a:bodyPr lIns="27432" rIns="0" wrap="none"/>
+          <a:p>
+            <a:r>
+              <a:rPr sz="900">
+                <a:latin typeface="BIZ UDPゴシック"/>
+                <a:ea typeface="BIZ UDPゴシック"/>
+                <a:cs typeface="BIZ UDPゴシック"/>
+              </a:rPr>
               <a:t>2027/2/17</a:t>
             </a:r>
           </a:p>
@@ -15471,7 +16139,11 @@
           <a:bodyPr/>
           <a:p>
             <a:fld id="{B6F15528-21DE-4FAA-801E-634DDDAF4B2B}" type="slidenum">
-              <a:rPr lang="en-US"/>
+              <a:rPr lang="en-US">
+                <a:latin typeface="BIZ UDPゴシック"/>
+                <a:ea typeface="BIZ UDPゴシック"/>
+                <a:cs typeface="BIZ UDPゴシック"/>
+              </a:rPr>
               <a:t>18</a:t>
             </a:fld>
           </a:p>
@@ -15598,6 +16270,9 @@
                 <a:solidFill>
                   <a:srgbClr val="12A38A"/>
                 </a:solidFill>
+                <a:latin typeface="BIZ UDPゴシック"/>
+                <a:ea typeface="BIZ UDPゴシック"/>
+                <a:cs typeface="BIZ UDPゴシック"/>
               </a:rPr>
               <a:t>睡眠・出費の疲れが減少</a:t>
             </a:r>
@@ -15614,6 +16289,9 @@
                 <a:solidFill>
                   <a:srgbClr val="24303F"/>
                 </a:solidFill>
+                <a:latin typeface="BIZ UDPゴシック"/>
+                <a:ea typeface="BIZ UDPゴシック"/>
+                <a:cs typeface="BIZ UDPゴシック"/>
               </a:rPr>
               <a:t>群Cで最も大きい。比較の疲れは変化なし</a:t>
             </a:r>
@@ -15705,6 +16383,9 @@
                 <a:solidFill>
                   <a:srgbClr val="0099FF"/>
                 </a:solidFill>
+                <a:latin typeface="BIZ UDPゴシック"/>
+                <a:ea typeface="BIZ UDPゴシック"/>
+                <a:cs typeface="BIZ UDPゴシック"/>
               </a:rPr>
               <a:t>楽しさは維持</a:t>
             </a:r>
@@ -15721,6 +16402,9 @@
                 <a:solidFill>
                   <a:srgbClr val="24303F"/>
                 </a:solidFill>
+                <a:latin typeface="BIZ UDPゴシック"/>
+                <a:ea typeface="BIZ UDPゴシック"/>
+                <a:cs typeface="BIZ UDPゴシック"/>
               </a:rPr>
               <a:t>3群とも 3.8〜3.9 のまま</a:t>
             </a:r>
@@ -15812,6 +16496,9 @@
                 <a:solidFill>
                   <a:srgbClr val="0B3C6E"/>
                 </a:solidFill>
+                <a:latin typeface="BIZ UDPゴシック"/>
+                <a:ea typeface="BIZ UDPゴシック"/>
+                <a:cs typeface="BIZ UDPゴシック"/>
               </a:rPr>
               <a:t>記録が続く</a:t>
             </a:r>
@@ -15828,6 +16515,9 @@
                 <a:solidFill>
                   <a:srgbClr val="24303F"/>
                 </a:solidFill>
+                <a:latin typeface="BIZ UDPゴシック"/>
+                <a:ea typeface="BIZ UDPゴシック"/>
+                <a:cs typeface="BIZ UDPゴシック"/>
               </a:rPr>
               <a:t>群Cは6週でも83%（探索的）</a:t>
             </a:r>
@@ -15891,6 +16581,9 @@
                 <a:solidFill>
                   <a:srgbClr val="E8457C"/>
                 </a:solidFill>
+                <a:latin typeface="BIZ UDPゴシック"/>
+                <a:ea typeface="BIZ UDPゴシック"/>
+                <a:cs typeface="BIZ UDPゴシック"/>
               </a:rPr>
               <a:t>※ 想定値：実データで差し替え</a:t>
             </a:r>
@@ -15943,6 +16636,9 @@
                 <a:solidFill>
                   <a:srgbClr val="24303F"/>
                 </a:solidFill>
+                <a:latin typeface="BIZ UDPゴシック"/>
+                <a:ea typeface="BIZ UDPゴシック"/>
+                <a:cs typeface="BIZ UDPゴシック"/>
               </a:rPr>
               <a:t>考察</a:t>
             </a:r>
@@ -15961,9 +16657,14 @@
         </p:nvSpPr>
         <p:spPr/>
         <p:txBody>
-          <a:bodyPr/>
-          <a:p>
-            <a:r>
+          <a:bodyPr lIns="27432" rIns="0" wrap="none"/>
+          <a:p>
+            <a:r>
+              <a:rPr sz="900">
+                <a:latin typeface="BIZ UDPゴシック"/>
+                <a:ea typeface="BIZ UDPゴシック"/>
+                <a:cs typeface="BIZ UDPゴシック"/>
+              </a:rPr>
               <a:t>2027/2/17</a:t>
             </a:r>
           </a:p>
@@ -15984,7 +16685,11 @@
           <a:bodyPr/>
           <a:p>
             <a:fld id="{B6F15528-21DE-4FAA-801E-634DDDAF4B2B}" type="slidenum">
-              <a:rPr lang="en-US"/>
+              <a:rPr lang="en-US">
+                <a:latin typeface="BIZ UDPゴシック"/>
+                <a:ea typeface="BIZ UDPゴシック"/>
+                <a:cs typeface="BIZ UDPゴシック"/>
+              </a:rPr>
               <a:t>19</a:t>
             </a:fld>
           </a:p>
@@ -16141,6 +16846,9 @@
                 <a:solidFill>
                   <a:srgbClr val="0B3C6E"/>
                 </a:solidFill>
+                <a:latin typeface="BIZ UDPゴシック"/>
+                <a:ea typeface="BIZ UDPゴシック"/>
+                <a:cs typeface="BIZ UDPゴシック"/>
               </a:rPr>
               <a:t>見せ方が行動を変えた</a:t>
             </a:r>
@@ -16180,6 +16888,9 @@
                 <a:solidFill>
                   <a:srgbClr val="24303F"/>
                 </a:solidFill>
+                <a:latin typeface="BIZ UDPゴシック"/>
+                <a:ea typeface="BIZ UDPゴシック"/>
+                <a:cs typeface="BIZ UDPゴシック"/>
               </a:rPr>
               <a:t>提案の中身は同じでも、自分に似たアバターで将来を見ると実行が増えた。未来の自分とのつながり感も群Cで高い</a:t>
             </a:r>
@@ -16337,6 +17048,9 @@
                 <a:solidFill>
                   <a:srgbClr val="0B3C6E"/>
                 </a:solidFill>
+                <a:latin typeface="BIZ UDPゴシック"/>
+                <a:ea typeface="BIZ UDPゴシック"/>
+                <a:cs typeface="BIZ UDPゴシック"/>
               </a:rPr>
               <a:t>「組み替え」は楽しさを損なわない</a:t>
             </a:r>
@@ -16376,6 +17090,9 @@
                 <a:solidFill>
                   <a:srgbClr val="24303F"/>
                 </a:solidFill>
+                <a:latin typeface="BIZ UDPゴシック"/>
+                <a:ea typeface="BIZ UDPゴシック"/>
+                <a:cs typeface="BIZ UDPゴシック"/>
               </a:rPr>
               <a:t>疲れは減り、楽しさは保たれた。一律に減らす支援とは異なる支え方</a:t>
             </a:r>
@@ -16533,6 +17250,9 @@
                 <a:solidFill>
                   <a:srgbClr val="0B3C6E"/>
                 </a:solidFill>
+                <a:latin typeface="BIZ UDPゴシック"/>
+                <a:ea typeface="BIZ UDPゴシック"/>
+                <a:cs typeface="BIZ UDPゴシック"/>
               </a:rPr>
               <a:t>ウェルビーイングへの効果は小さい</a:t>
             </a:r>
@@ -16572,6 +17292,9 @@
                 <a:solidFill>
                   <a:srgbClr val="24303F"/>
                 </a:solidFill>
+                <a:latin typeface="BIZ UDPゴシック"/>
+                <a:ea typeface="BIZ UDPゴシック"/>
+                <a:cs typeface="BIZ UDPゴシック"/>
               </a:rPr>
               <a:t>6週間は習慣の定着（中央値66日：Lally et al., 2010）より短い。効果量 d ≈ 0.2 を前提にした規模が必要</a:t>
             </a:r>
@@ -16729,6 +17452,9 @@
                 <a:solidFill>
                   <a:srgbClr val="0B3C6E"/>
                 </a:solidFill>
+                <a:latin typeface="BIZ UDPゴシック"/>
+                <a:ea typeface="BIZ UDPゴシック"/>
+                <a:cs typeface="BIZ UDPゴシック"/>
               </a:rPr>
               <a:t>不確かさの提示は安全に使える</a:t>
             </a:r>
@@ -16768,6 +17494,9 @@
                 <a:solidFill>
                   <a:srgbClr val="24303F"/>
                 </a:solidFill>
+                <a:latin typeface="BIZ UDPゴシック"/>
+                <a:ea typeface="BIZ UDPゴシック"/>
+                <a:cs typeface="BIZ UDPゴシック"/>
               </a:rPr>
               <a:t>区間はおおむね正直で、予測を見た後の不安は群Bと同程度</a:t>
             </a:r>
@@ -16829,6 +17558,9 @@
                 <a:solidFill>
                   <a:srgbClr val="FFFFFF"/>
                 </a:solidFill>
+                <a:latin typeface="BIZ UDPゴシック"/>
+                <a:ea typeface="BIZ UDPゴシック"/>
+                <a:cs typeface="BIZ UDPゴシック"/>
               </a:rPr>
               <a:t>貢献：同じ提案でも「見せ方」で実行を高められること、不確かさを見せても安全なことを示した</a:t>
             </a:r>
@@ -16881,6 +17613,9 @@
                 <a:solidFill>
                   <a:srgbClr val="24303F"/>
                 </a:solidFill>
+                <a:latin typeface="BIZ UDPゴシック"/>
+                <a:ea typeface="BIZ UDPゴシック"/>
+                <a:cs typeface="BIZ UDPゴシック"/>
               </a:rPr>
               <a:t>発表の流れ</a:t>
             </a:r>
@@ -16899,9 +17634,14 @@
         </p:nvSpPr>
         <p:spPr/>
         <p:txBody>
-          <a:bodyPr/>
-          <a:p>
-            <a:r>
+          <a:bodyPr lIns="27432" rIns="0" wrap="none"/>
+          <a:p>
+            <a:r>
+              <a:rPr sz="900">
+                <a:latin typeface="BIZ UDPゴシック"/>
+                <a:ea typeface="BIZ UDPゴシック"/>
+                <a:cs typeface="BIZ UDPゴシック"/>
+              </a:rPr>
               <a:t>2027/2/17</a:t>
             </a:r>
           </a:p>
@@ -16922,7 +17662,11 @@
           <a:bodyPr/>
           <a:p>
             <a:fld id="{B6F15528-21DE-4FAA-801E-634DDDAF4B2B}" type="slidenum">
-              <a:rPr lang="en-US"/>
+              <a:rPr lang="en-US">
+                <a:latin typeface="BIZ UDPゴシック"/>
+                <a:ea typeface="BIZ UDPゴシック"/>
+                <a:cs typeface="BIZ UDPゴシック"/>
+              </a:rPr>
               <a:t>2</a:t>
             </a:fld>
           </a:p>
@@ -17033,6 +17777,9 @@
                 <a:solidFill>
                   <a:srgbClr val="FFFFFF"/>
                 </a:solidFill>
+                <a:latin typeface="BIZ UDPゴシック"/>
+                <a:ea typeface="BIZ UDPゴシック"/>
+                <a:cs typeface="BIZ UDPゴシック"/>
               </a:rPr>
               <a:t>1</a:t>
             </a:r>
@@ -17072,6 +17819,9 @@
                 <a:solidFill>
                   <a:srgbClr val="0B3C6E"/>
                 </a:solidFill>
+                <a:latin typeface="BIZ UDPゴシック"/>
+                <a:ea typeface="BIZ UDPゴシック"/>
+                <a:cs typeface="BIZ UDPゴシック"/>
               </a:rPr>
               <a:t>背景</a:t>
             </a:r>
@@ -17088,6 +17838,9 @@
                 <a:solidFill>
                   <a:srgbClr val="5A6676"/>
                 </a:solidFill>
+                <a:latin typeface="BIZ UDPゴシック"/>
+                <a:ea typeface="BIZ UDPゴシック"/>
+                <a:cs typeface="BIZ UDPゴシック"/>
               </a:rPr>
               <a:t>推し活の広がりと「推し疲れ」</a:t>
             </a:r>
@@ -17199,6 +17952,9 @@
                 <a:solidFill>
                   <a:srgbClr val="FFFFFF"/>
                 </a:solidFill>
+                <a:latin typeface="BIZ UDPゴシック"/>
+                <a:ea typeface="BIZ UDPゴシック"/>
+                <a:cs typeface="BIZ UDPゴシック"/>
               </a:rPr>
               <a:t>2</a:t>
             </a:r>
@@ -17238,6 +17994,9 @@
                 <a:solidFill>
                   <a:srgbClr val="0B3C6E"/>
                 </a:solidFill>
+                <a:latin typeface="BIZ UDPゴシック"/>
+                <a:ea typeface="BIZ UDPゴシック"/>
+                <a:cs typeface="BIZ UDPゴシック"/>
               </a:rPr>
               <a:t>予備調査</a:t>
             </a:r>
@@ -17254,6 +18013,9 @@
                 <a:solidFill>
                   <a:srgbClr val="5A6676"/>
                 </a:solidFill>
+                <a:latin typeface="BIZ UDPゴシック"/>
+                <a:ea typeface="BIZ UDPゴシック"/>
+                <a:cs typeface="BIZ UDPゴシック"/>
               </a:rPr>
               <a:t>215名の調査から分かったこと</a:t>
             </a:r>
@@ -17365,6 +18127,9 @@
                 <a:solidFill>
                   <a:srgbClr val="FFFFFF"/>
                 </a:solidFill>
+                <a:latin typeface="BIZ UDPゴシック"/>
+                <a:ea typeface="BIZ UDPゴシック"/>
+                <a:cs typeface="BIZ UDPゴシック"/>
               </a:rPr>
               <a:t>3</a:t>
             </a:r>
@@ -17404,6 +18169,9 @@
                 <a:solidFill>
                   <a:srgbClr val="0B3C6E"/>
                 </a:solidFill>
+                <a:latin typeface="BIZ UDPゴシック"/>
+                <a:ea typeface="BIZ UDPゴシック"/>
+                <a:cs typeface="BIZ UDPゴシック"/>
               </a:rPr>
               <a:t>目的と問い</a:t>
             </a:r>
@@ -17420,6 +18188,9 @@
                 <a:solidFill>
                   <a:srgbClr val="5A6676"/>
                 </a:solidFill>
+                <a:latin typeface="BIZ UDPゴシック"/>
+                <a:ea typeface="BIZ UDPゴシック"/>
+                <a:cs typeface="BIZ UDPゴシック"/>
               </a:rPr>
               <a:t>RQ1〜3</a:t>
             </a:r>
@@ -17531,6 +18302,9 @@
                 <a:solidFill>
                   <a:srgbClr val="FFFFFF"/>
                 </a:solidFill>
+                <a:latin typeface="BIZ UDPゴシック"/>
+                <a:ea typeface="BIZ UDPゴシック"/>
+                <a:cs typeface="BIZ UDPゴシック"/>
               </a:rPr>
               <a:t>4</a:t>
             </a:r>
@@ -17570,6 +18344,9 @@
                 <a:solidFill>
                   <a:srgbClr val="0B3C6E"/>
                 </a:solidFill>
+                <a:latin typeface="BIZ UDPゴシック"/>
+                <a:ea typeface="BIZ UDPゴシック"/>
+                <a:cs typeface="BIZ UDPゴシック"/>
               </a:rPr>
               <a:t>提案システム</a:t>
             </a:r>
@@ -17586,6 +18363,9 @@
                 <a:solidFill>
                   <a:srgbClr val="5A6676"/>
                 </a:solidFill>
+                <a:latin typeface="BIZ UDPゴシック"/>
+                <a:ea typeface="BIZ UDPゴシック"/>
+                <a:cs typeface="BIZ UDPゴシック"/>
               </a:rPr>
               <a:t>OshiFit（ツイン・提案・ゆらぎアバター）</a:t>
             </a:r>
@@ -17697,6 +18477,9 @@
                 <a:solidFill>
                   <a:srgbClr val="FFFFFF"/>
                 </a:solidFill>
+                <a:latin typeface="BIZ UDPゴシック"/>
+                <a:ea typeface="BIZ UDPゴシック"/>
+                <a:cs typeface="BIZ UDPゴシック"/>
               </a:rPr>
               <a:t>5</a:t>
             </a:r>
@@ -17736,6 +18519,9 @@
                 <a:solidFill>
                   <a:srgbClr val="0B3C6E"/>
                 </a:solidFill>
+                <a:latin typeface="BIZ UDPゴシック"/>
+                <a:ea typeface="BIZ UDPゴシック"/>
+                <a:cs typeface="BIZ UDPゴシック"/>
               </a:rPr>
               <a:t>実験</a:t>
             </a:r>
@@ -17752,6 +18538,9 @@
                 <a:solidFill>
                   <a:srgbClr val="5A6676"/>
                 </a:solidFill>
+                <a:latin typeface="BIZ UDPゴシック"/>
+                <a:ea typeface="BIZ UDPゴシック"/>
+                <a:cs typeface="BIZ UDPゴシック"/>
               </a:rPr>
               <a:t>6週間・3群の無作為化比較実験</a:t>
             </a:r>
@@ -17863,6 +18652,9 @@
                 <a:solidFill>
                   <a:srgbClr val="FFFFFF"/>
                 </a:solidFill>
+                <a:latin typeface="BIZ UDPゴシック"/>
+                <a:ea typeface="BIZ UDPゴシック"/>
+                <a:cs typeface="BIZ UDPゴシック"/>
               </a:rPr>
               <a:t>6</a:t>
             </a:r>
@@ -17902,6 +18694,9 @@
                 <a:solidFill>
                   <a:srgbClr val="0B3C6E"/>
                 </a:solidFill>
+                <a:latin typeface="BIZ UDPゴシック"/>
+                <a:ea typeface="BIZ UDPゴシック"/>
+                <a:cs typeface="BIZ UDPゴシック"/>
               </a:rPr>
               <a:t>結果と考察</a:t>
             </a:r>
@@ -17918,6 +18713,9 @@
                 <a:solidFill>
                   <a:srgbClr val="5A6676"/>
                 </a:solidFill>
+                <a:latin typeface="BIZ UDPゴシック"/>
+                <a:ea typeface="BIZ UDPゴシック"/>
+                <a:cs typeface="BIZ UDPゴシック"/>
               </a:rPr>
               <a:t>RQ ごとの結果・限界・まとめ</a:t>
             </a:r>
@@ -17970,6 +18768,9 @@
                 <a:solidFill>
                   <a:srgbClr val="24303F"/>
                 </a:solidFill>
+                <a:latin typeface="BIZ UDPゴシック"/>
+                <a:ea typeface="BIZ UDPゴシック"/>
+                <a:cs typeface="BIZ UDPゴシック"/>
               </a:rPr>
               <a:t>限界と今後の課題</a:t>
             </a:r>
@@ -17988,9 +18789,14 @@
         </p:nvSpPr>
         <p:spPr/>
         <p:txBody>
-          <a:bodyPr/>
-          <a:p>
-            <a:r>
+          <a:bodyPr lIns="27432" rIns="0" wrap="none"/>
+          <a:p>
+            <a:r>
+              <a:rPr sz="900">
+                <a:latin typeface="BIZ UDPゴシック"/>
+                <a:ea typeface="BIZ UDPゴシック"/>
+                <a:cs typeface="BIZ UDPゴシック"/>
+              </a:rPr>
               <a:t>2027/2/17</a:t>
             </a:r>
           </a:p>
@@ -18011,7 +18817,11 @@
           <a:bodyPr/>
           <a:p>
             <a:fld id="{B6F15528-21DE-4FAA-801E-634DDDAF4B2B}" type="slidenum">
-              <a:rPr lang="en-US"/>
+              <a:rPr lang="en-US">
+                <a:latin typeface="BIZ UDPゴシック"/>
+                <a:ea typeface="BIZ UDPゴシック"/>
+                <a:cs typeface="BIZ UDPゴシック"/>
+              </a:rPr>
               <a:t>20</a:t>
             </a:fld>
           </a:p>
@@ -18168,6 +18978,9 @@
                 <a:solidFill>
                   <a:srgbClr val="0B3C6E"/>
                 </a:solidFill>
+                <a:latin typeface="BIZ UDPゴシック"/>
+                <a:ea typeface="BIZ UDPゴシック"/>
+                <a:cs typeface="BIZ UDPゴシック"/>
               </a:rPr>
               <a:t>期間と規模</a:t>
             </a:r>
@@ -18207,6 +19020,9 @@
                 <a:solidFill>
                   <a:srgbClr val="24303F"/>
                 </a:solidFill>
+                <a:latin typeface="BIZ UDPゴシック"/>
+                <a:ea typeface="BIZ UDPゴシック"/>
+                <a:cs typeface="BIZ UDPゴシック"/>
               </a:rPr>
               <a:t>6週間・1群約65名。d ≈ 0.2 の差を検出するには、共変量を入れても1群250名以上が必要</a:t>
             </a:r>
@@ -18364,6 +19180,9 @@
                 <a:solidFill>
                   <a:srgbClr val="0B3C6E"/>
                 </a:solidFill>
+                <a:latin typeface="BIZ UDPゴシック"/>
+                <a:ea typeface="BIZ UDPゴシック"/>
+                <a:cs typeface="BIZ UDPゴシック"/>
               </a:rPr>
               <a:t>要素の切り分け</a:t>
             </a:r>
@@ -18403,6 +19222,9 @@
                 <a:solidFill>
                   <a:srgbClr val="24303F"/>
                 </a:solidFill>
+                <a:latin typeface="BIZ UDPゴシック"/>
+                <a:ea typeface="BIZ UDPゴシック"/>
+                <a:cs typeface="BIZ UDPゴシック"/>
               </a:rPr>
               <a:t>群Cはアバターと点の表示の両方を見た。どちらが効いたかは分からない</a:t>
             </a:r>
@@ -18560,6 +19382,9 @@
                 <a:solidFill>
                   <a:srgbClr val="0B3C6E"/>
                 </a:solidFill>
+                <a:latin typeface="BIZ UDPゴシック"/>
+                <a:ea typeface="BIZ UDPゴシック"/>
+                <a:cs typeface="BIZ UDPゴシック"/>
               </a:rPr>
               <a:t>自己報告</a:t>
             </a:r>
@@ -18599,6 +19424,9 @@
                 <a:solidFill>
                   <a:srgbClr val="24303F"/>
                 </a:solidFill>
+                <a:latin typeface="BIZ UDPゴシック"/>
+                <a:ea typeface="BIZ UDPゴシック"/>
+                <a:cs typeface="BIZ UDPゴシック"/>
               </a:rPr>
               <a:t>記録とWHO-5は自己報告。心拍などの生理指標との組み合わせ（今井・大井, 2025）</a:t>
             </a:r>
@@ -18756,6 +19584,9 @@
                 <a:solidFill>
                   <a:srgbClr val="0B3C6E"/>
                 </a:solidFill>
+                <a:latin typeface="BIZ UDPゴシック"/>
+                <a:ea typeface="BIZ UDPゴシック"/>
+                <a:cs typeface="BIZ UDPゴシック"/>
               </a:rPr>
               <a:t>参加者の偏り</a:t>
             </a:r>
@@ -18795,6 +19626,9 @@
                 <a:solidFill>
                   <a:srgbClr val="24303F"/>
                 </a:solidFill>
+                <a:latin typeface="BIZ UDPゴシック"/>
+                <a:ea typeface="BIZ UDPゴシック"/>
+                <a:cs typeface="BIZ UDPゴシック"/>
               </a:rPr>
               <a:t>大学生・女性が中心。年齢や推しのジャンルが違う集団での検証</a:t>
             </a:r>
@@ -18878,6 +19712,9 @@
                 <a:solidFill>
                   <a:srgbClr val="0B3C6E"/>
                 </a:solidFill>
+                <a:latin typeface="BIZ UDPゴシック"/>
+                <a:ea typeface="BIZ UDPゴシック"/>
+                <a:cs typeface="BIZ UDPゴシック"/>
               </a:rPr>
               <a:t>今後：長期（3か月以上）の追跡、表示要素を切り分ける実験、他の領域（SNS依存・ゲーム）への応用</a:t>
             </a:r>
@@ -18894,6 +19731,9 @@
                 <a:solidFill>
                   <a:srgbClr val="24303F"/>
                 </a:solidFill>
+                <a:latin typeface="BIZ UDPゴシック"/>
+                <a:ea typeface="BIZ UDPゴシック"/>
+                <a:cs typeface="BIZ UDPゴシック"/>
               </a:rPr>
               <a:t>プラットフォーム事業者と連携した「持続可能なファン経済」への展開</a:t>
             </a:r>
@@ -18946,6 +19786,9 @@
                 <a:solidFill>
                   <a:srgbClr val="24303F"/>
                 </a:solidFill>
+                <a:latin typeface="BIZ UDPゴシック"/>
+                <a:ea typeface="BIZ UDPゴシック"/>
+                <a:cs typeface="BIZ UDPゴシック"/>
               </a:rPr>
               <a:t>結論</a:t>
             </a:r>
@@ -18964,9 +19807,14 @@
         </p:nvSpPr>
         <p:spPr/>
         <p:txBody>
-          <a:bodyPr/>
-          <a:p>
-            <a:r>
+          <a:bodyPr lIns="27432" rIns="0" wrap="none"/>
+          <a:p>
+            <a:r>
+              <a:rPr sz="900">
+                <a:latin typeface="BIZ UDPゴシック"/>
+                <a:ea typeface="BIZ UDPゴシック"/>
+                <a:cs typeface="BIZ UDPゴシック"/>
+              </a:rPr>
               <a:t>2027/2/17</a:t>
             </a:r>
           </a:p>
@@ -18987,7 +19835,11 @@
           <a:bodyPr/>
           <a:p>
             <a:fld id="{B6F15528-21DE-4FAA-801E-634DDDAF4B2B}" type="slidenum">
-              <a:rPr lang="en-US"/>
+              <a:rPr lang="en-US">
+                <a:latin typeface="BIZ UDPゴシック"/>
+                <a:ea typeface="BIZ UDPゴシック"/>
+                <a:cs typeface="BIZ UDPゴシック"/>
+              </a:rPr>
               <a:t>21</a:t>
             </a:fld>
           </a:p>
@@ -19090,7 +19942,7 @@
               <a:buClr>
                 <a:srgbClr val="CCE9FF"/>
               </a:buClr>
-              <a:buFont typeface="Arial"/>
+              <a:buFont typeface="BIZ UDPゴシック"/>
               <a:buChar char="•"/>
             </a:pPr>
             <a:r>
@@ -19098,6 +19950,9 @@
                 <a:solidFill>
                   <a:srgbClr val="FFFFFF"/>
                 </a:solidFill>
+                <a:latin typeface="BIZ UDPゴシック"/>
+                <a:ea typeface="BIZ UDPゴシック"/>
+                <a:cs typeface="BIZ UDPゴシック"/>
               </a:rPr>
               <a:t>記録にもとづく予測と、自分に似たアバターによる将来像を統合したシステム OshiFit を構築した</a:t>
             </a:r>
@@ -19110,7 +19965,7 @@
               <a:buClr>
                 <a:srgbClr val="CCE9FF"/>
               </a:buClr>
-              <a:buFont typeface="Arial"/>
+              <a:buFont typeface="BIZ UDPゴシック"/>
               <a:buChar char="•"/>
             </a:pPr>
             <a:r>
@@ -19118,6 +19973,9 @@
                 <a:solidFill>
                   <a:srgbClr val="FFFFFF"/>
                 </a:solidFill>
+                <a:latin typeface="BIZ UDPゴシック"/>
+                <a:ea typeface="BIZ UDPゴシック"/>
+                <a:cs typeface="BIZ UDPゴシック"/>
               </a:rPr>
               <a:t>RQ1：個人補正で予測の誤差が約26%減少</a:t>
             </a:r>
@@ -19130,7 +19988,7 @@
               <a:buClr>
                 <a:srgbClr val="CCE9FF"/>
               </a:buClr>
-              <a:buFont typeface="Arial"/>
+              <a:buFont typeface="BIZ UDPゴシック"/>
               <a:buChar char="•"/>
             </a:pPr>
             <a:r>
@@ -19138,6 +19996,9 @@
                 <a:solidFill>
                   <a:srgbClr val="FFFFFF"/>
                 </a:solidFill>
+                <a:latin typeface="BIZ UDPゴシック"/>
+                <a:ea typeface="BIZ UDPゴシック"/>
+                <a:cs typeface="BIZ UDPゴシック"/>
               </a:rPr>
               <a:t>RQ2：アバターで見込みを見ると、提案の実行が増えた（OR 1.71）</a:t>
             </a:r>
@@ -19150,7 +20011,7 @@
               <a:buClr>
                 <a:srgbClr val="CCE9FF"/>
               </a:buClr>
-              <a:buFont typeface="Arial"/>
+              <a:buFont typeface="BIZ UDPゴシック"/>
               <a:buChar char="•"/>
             </a:pPr>
             <a:r>
@@ -19158,6 +20019,9 @@
                 <a:solidFill>
                   <a:srgbClr val="FFFFFF"/>
                 </a:solidFill>
+                <a:latin typeface="BIZ UDPゴシック"/>
+                <a:ea typeface="BIZ UDPゴシック"/>
+                <a:cs typeface="BIZ UDPゴシック"/>
               </a:rPr>
               <a:t>RQ3：ウェルビーイングの向上は主要な比較では確認できず</a:t>
             </a:r>
@@ -19241,6 +20105,9 @@
                 <a:solidFill>
                   <a:srgbClr val="12A38A"/>
                 </a:solidFill>
+                <a:latin typeface="BIZ UDPゴシック"/>
+                <a:ea typeface="BIZ UDPゴシック"/>
+                <a:cs typeface="BIZ UDPゴシック"/>
               </a:rPr>
               <a:t>「減らす」ではなく「組み替える」、そして不確かさを隠さず見せる</a:t>
             </a:r>
@@ -19257,6 +20124,9 @@
                 <a:solidFill>
                   <a:srgbClr val="24303F"/>
                 </a:solidFill>
+                <a:latin typeface="BIZ UDPゴシック"/>
+                <a:ea typeface="BIZ UDPゴシック"/>
+                <a:cs typeface="BIZ UDPゴシック"/>
               </a:rPr>
               <a:t>推し活のように正解が人によって違う領域で、本人が自分で選べる行動変容の支援の形を示した</a:t>
             </a:r>
@@ -19320,6 +20190,9 @@
                 <a:solidFill>
                   <a:srgbClr val="E8457C"/>
                 </a:solidFill>
+                <a:latin typeface="BIZ UDPゴシック"/>
+                <a:ea typeface="BIZ UDPゴシック"/>
+                <a:cs typeface="BIZ UDPゴシック"/>
               </a:rPr>
               <a:t>※ 結果の数値は想定値</a:t>
             </a:r>
@@ -19372,6 +20245,9 @@
                 <a:solidFill>
                   <a:srgbClr val="24303F"/>
                 </a:solidFill>
+                <a:latin typeface="BIZ UDPゴシック"/>
+                <a:ea typeface="BIZ UDPゴシック"/>
+                <a:cs typeface="BIZ UDPゴシック"/>
               </a:rPr>
               <a:t>研究業績</a:t>
             </a:r>
@@ -19390,9 +20266,14 @@
         </p:nvSpPr>
         <p:spPr/>
         <p:txBody>
-          <a:bodyPr/>
-          <a:p>
-            <a:r>
+          <a:bodyPr lIns="27432" rIns="0" wrap="none"/>
+          <a:p>
+            <a:r>
+              <a:rPr sz="900">
+                <a:latin typeface="BIZ UDPゴシック"/>
+                <a:ea typeface="BIZ UDPゴシック"/>
+                <a:cs typeface="BIZ UDPゴシック"/>
+              </a:rPr>
               <a:t>2027/2/17</a:t>
             </a:r>
           </a:p>
@@ -19413,7 +20294,11 @@
           <a:bodyPr/>
           <a:p>
             <a:fld id="{B6F15528-21DE-4FAA-801E-634DDDAF4B2B}" type="slidenum">
-              <a:rPr lang="en-US"/>
+              <a:rPr lang="en-US">
+                <a:latin typeface="BIZ UDPゴシック"/>
+                <a:ea typeface="BIZ UDPゴシック"/>
+                <a:cs typeface="BIZ UDPゴシック"/>
+              </a:rPr>
               <a:t>22</a:t>
             </a:fld>
           </a:p>
@@ -19452,6 +20337,9 @@
                 <a:solidFill>
                   <a:srgbClr val="0B3C6E"/>
                 </a:solidFill>
+                <a:latin typeface="BIZ UDPゴシック"/>
+                <a:ea typeface="BIZ UDPゴシック"/>
+                <a:cs typeface="BIZ UDPゴシック"/>
               </a:rPr>
               <a:t>国際会議</a:t>
             </a:r>
@@ -19464,7 +20352,7 @@
               <a:buClr>
                 <a:srgbClr val="0099FF"/>
               </a:buClr>
-              <a:buFont typeface="Arial"/>
+              <a:buFont typeface="BIZ UDPゴシック"/>
               <a:buChar char="•"/>
             </a:pPr>
             <a:r>
@@ -19472,6 +20360,9 @@
                 <a:solidFill>
                   <a:srgbClr val="24303F"/>
                 </a:solidFill>
+                <a:latin typeface="BIZ UDPゴシック"/>
+                <a:ea typeface="BIZ UDPゴシック"/>
+                <a:cs typeface="BIZ UDPゴシック"/>
               </a:rPr>
               <a:t>G. Imai, S. Ooi: OshiFit: Possible-Selves Avatars for Uncertainty-Aware Behavior Change in Fan Activities, ACM CHIIR 2027 (Short Paper), 2027.（採択）</a:t>
             </a:r>
@@ -19484,7 +20375,7 @@
               <a:buClr>
                 <a:srgbClr val="0099FF"/>
               </a:buClr>
-              <a:buFont typeface="Arial"/>
+              <a:buFont typeface="BIZ UDPゴシック"/>
               <a:buChar char="•"/>
             </a:pPr>
             <a:r>
@@ -19492,6 +20383,9 @@
                 <a:solidFill>
                   <a:srgbClr val="24303F"/>
                 </a:solidFill>
+                <a:latin typeface="BIZ UDPゴシック"/>
+                <a:ea typeface="BIZ UDPゴシック"/>
+                <a:cs typeface="BIZ UDPゴシック"/>
               </a:rPr>
               <a:t>G. Imai, S. Ooi: OshiFit: Study on Proposal System with “Oshi-katsu” based on Individual Characteristics Predicted by One’s Own Avatar, IEVC 2026, 2026.</a:t>
             </a:r>
@@ -19508,6 +20402,9 @@
                 <a:solidFill>
                   <a:srgbClr val="0B3C6E"/>
                 </a:solidFill>
+                <a:latin typeface="BIZ UDPゴシック"/>
+                <a:ea typeface="BIZ UDPゴシック"/>
+                <a:cs typeface="BIZ UDPゴシック"/>
               </a:rPr>
               <a:t>国内発表</a:t>
             </a:r>
@@ -19520,7 +20417,7 @@
               <a:buClr>
                 <a:srgbClr val="0099FF"/>
               </a:buClr>
-              <a:buFont typeface="Arial"/>
+              <a:buFont typeface="BIZ UDPゴシック"/>
               <a:buChar char="•"/>
             </a:pPr>
             <a:r>
@@ -19528,6 +20425,9 @@
                 <a:solidFill>
                   <a:srgbClr val="24303F"/>
                 </a:solidFill>
+                <a:latin typeface="BIZ UDPゴシック"/>
+                <a:ea typeface="BIZ UDPゴシック"/>
+                <a:cs typeface="BIZ UDPゴシック"/>
               </a:rPr>
               <a:t>今井元, 大井翔: 推し活中の心拍数とストレスの関係性に関する検討, 第3回ウェルビーイング学会年次大会, 2025.</a:t>
             </a:r>
@@ -19540,7 +20440,7 @@
               <a:buClr>
                 <a:srgbClr val="0099FF"/>
               </a:buClr>
-              <a:buFont typeface="Arial"/>
+              <a:buFont typeface="BIZ UDPゴシック"/>
               <a:buChar char="•"/>
             </a:pPr>
             <a:r>
@@ -19548,6 +20448,9 @@
                 <a:solidFill>
                   <a:srgbClr val="24303F"/>
                 </a:solidFill>
+                <a:latin typeface="BIZ UDPゴシック"/>
+                <a:ea typeface="BIZ UDPゴシック"/>
+                <a:cs typeface="BIZ UDPゴシック"/>
               </a:rPr>
               <a:t>今井元, 大井翔: 推し活の充実と推し疲れに関する調査（仮題）, AIxMHC Summer Edition, 2026.</a:t>
             </a:r>
@@ -19560,7 +20463,7 @@
               <a:buClr>
                 <a:srgbClr val="0099FF"/>
               </a:buClr>
-              <a:buFont typeface="Arial"/>
+              <a:buFont typeface="BIZ UDPゴシック"/>
               <a:buChar char="•"/>
             </a:pPr>
             <a:r>
@@ -19568,6 +20471,9 @@
                 <a:solidFill>
                   <a:srgbClr val="24303F"/>
                 </a:solidFill>
+                <a:latin typeface="BIZ UDPゴシック"/>
+                <a:ea typeface="BIZ UDPゴシック"/>
+                <a:cs typeface="BIZ UDPゴシック"/>
               </a:rPr>
               <a:t>今井元, 大井翔: （題目）, 情報処理学会関西支部大会 G-43, 2026.</a:t>
             </a:r>
@@ -19584,6 +20490,9 @@
                 <a:solidFill>
                   <a:srgbClr val="0B3C6E"/>
                 </a:solidFill>
+                <a:latin typeface="BIZ UDPゴシック"/>
+                <a:ea typeface="BIZ UDPゴシック"/>
+                <a:cs typeface="BIZ UDPゴシック"/>
               </a:rPr>
               <a:t>投稿準備中</a:t>
             </a:r>
@@ -19596,7 +20505,7 @@
               <a:buClr>
                 <a:srgbClr val="0099FF"/>
               </a:buClr>
-              <a:buFont typeface="Arial"/>
+              <a:buFont typeface="BIZ UDPゴシック"/>
               <a:buChar char="•"/>
             </a:pPr>
             <a:r>
@@ -19604,6 +20513,9 @@
                 <a:solidFill>
                   <a:srgbClr val="24303F"/>
                 </a:solidFill>
+                <a:latin typeface="BIZ UDPゴシック"/>
+                <a:ea typeface="BIZ UDPゴシック"/>
+                <a:cs typeface="BIZ UDPゴシック"/>
               </a:rPr>
               <a:t>IEEE Access（本実験の結果をまとめた論文）</a:t>
             </a:r>
@@ -19667,6 +20579,9 @@
                 <a:solidFill>
                   <a:srgbClr val="E8457C"/>
                 </a:solidFill>
+                <a:latin typeface="BIZ UDPゴシック"/>
+                <a:ea typeface="BIZ UDPゴシック"/>
+                <a:cs typeface="BIZ UDPゴシック"/>
               </a:rPr>
               <a:t>※ 題目・採否は要確認</a:t>
             </a:r>
@@ -19719,6 +20634,9 @@
                 <a:solidFill>
                   <a:srgbClr val="24303F"/>
                 </a:solidFill>
+                <a:latin typeface="BIZ UDPゴシック"/>
+                <a:ea typeface="BIZ UDPゴシック"/>
+                <a:cs typeface="BIZ UDPゴシック"/>
               </a:rPr>
               <a:t>主な参考文献</a:t>
             </a:r>
@@ -19737,9 +20655,14 @@
         </p:nvSpPr>
         <p:spPr/>
         <p:txBody>
-          <a:bodyPr/>
-          <a:p>
-            <a:r>
+          <a:bodyPr lIns="27432" rIns="0" wrap="none"/>
+          <a:p>
+            <a:r>
+              <a:rPr sz="900">
+                <a:latin typeface="BIZ UDPゴシック"/>
+                <a:ea typeface="BIZ UDPゴシック"/>
+                <a:cs typeface="BIZ UDPゴシック"/>
+              </a:rPr>
               <a:t>2027/2/17</a:t>
             </a:r>
           </a:p>
@@ -19760,7 +20683,11 @@
           <a:bodyPr/>
           <a:p>
             <a:fld id="{B6F15528-21DE-4FAA-801E-634DDDAF4B2B}" type="slidenum">
-              <a:rPr lang="en-US"/>
+              <a:rPr lang="en-US">
+                <a:latin typeface="BIZ UDPゴシック"/>
+                <a:ea typeface="BIZ UDPゴシック"/>
+                <a:cs typeface="BIZ UDPゴシック"/>
+              </a:rPr>
               <a:t>23</a:t>
             </a:fld>
           </a:p>
@@ -19799,6 +20726,9 @@
                 <a:solidFill>
                   <a:srgbClr val="24303F"/>
                 </a:solidFill>
+                <a:latin typeface="BIZ UDPゴシック"/>
+                <a:ea typeface="BIZ UDPゴシック"/>
+                <a:cs typeface="BIZ UDPゴシック"/>
               </a:rPr>
               <a:t>Choe, E. K., et al. (2014). Understanding quantified-selfers' practices in collecting and exploring personal data. CHI '14, 1143–1152.</a:t>
             </a:r>
@@ -19815,6 +20745,9 @@
                 <a:solidFill>
                   <a:srgbClr val="24303F"/>
                 </a:solidFill>
+                <a:latin typeface="BIZ UDPゴシック"/>
+                <a:ea typeface="BIZ UDPゴシック"/>
+                <a:cs typeface="BIZ UDPゴシック"/>
               </a:rPr>
               <a:t>Fox, J., &amp; Bailenson, J. N. (2009). Virtual self-modeling. Media Psychology, 12(1), 1–25.</a:t>
             </a:r>
@@ -19831,6 +20764,9 @@
                 <a:solidFill>
                   <a:srgbClr val="24303F"/>
                 </a:solidFill>
+                <a:latin typeface="BIZ UDPゴシック"/>
+                <a:ea typeface="BIZ UDPゴシック"/>
+                <a:cs typeface="BIZ UDPゴシック"/>
               </a:rPr>
               <a:t>Hershfield, H. E., et al. (2011). Increasing saving behavior through age-progressed renderings of the future self. JMR, 48(SPL), S23–S37.</a:t>
             </a:r>
@@ -19847,6 +20783,9 @@
                 <a:solidFill>
                   <a:srgbClr val="24303F"/>
                 </a:solidFill>
+                <a:latin typeface="BIZ UDPゴシック"/>
+                <a:ea typeface="BIZ UDPゴシック"/>
+                <a:cs typeface="BIZ UDPゴシック"/>
               </a:rPr>
               <a:t>Kay, M., Kola, T., Hullman, J. R., &amp; Munson, S. A. (2016). When (ish) is my bus? CHI '16, 5092–5103.</a:t>
             </a:r>
@@ -19863,6 +20802,9 @@
                 <a:solidFill>
                   <a:srgbClr val="24303F"/>
                 </a:solidFill>
+                <a:latin typeface="BIZ UDPゴシック"/>
+                <a:ea typeface="BIZ UDPゴシック"/>
+                <a:cs typeface="BIZ UDPゴシック"/>
               </a:rPr>
               <a:t>Lally, P., et al. (2010). How are habits formed. European Journal of Social Psychology, 40(6), 998–1009.</a:t>
             </a:r>
@@ -19879,6 +20821,9 @@
                 <a:solidFill>
                   <a:srgbClr val="24303F"/>
                 </a:solidFill>
+                <a:latin typeface="BIZ UDPゴシック"/>
+                <a:ea typeface="BIZ UDPゴシック"/>
+                <a:cs typeface="BIZ UDPゴシック"/>
               </a:rPr>
               <a:t>Topp, C. W., et al. (2015). The WHO-5 Well-Being Index. Psychotherapy and Psychosomatics, 84(3), 167–176.</a:t>
             </a:r>
@@ -19895,6 +20840,9 @@
                 <a:solidFill>
                   <a:srgbClr val="24303F"/>
                 </a:solidFill>
+                <a:latin typeface="BIZ UDPゴシック"/>
+                <a:ea typeface="BIZ UDPゴシック"/>
+                <a:cs typeface="BIZ UDPゴシック"/>
               </a:rPr>
               <a:t>Yee, N., &amp; Bailenson, J. (2007). The Proteus Effect. Human Communication Research, 33(3), 271–290.</a:t>
             </a:r>
@@ -19911,6 +20859,9 @@
                 <a:solidFill>
                   <a:srgbClr val="24303F"/>
                 </a:solidFill>
+                <a:latin typeface="BIZ UDPゴシック"/>
+                <a:ea typeface="BIZ UDPゴシック"/>
+                <a:cs typeface="BIZ UDPゴシック"/>
               </a:rPr>
               <a:t>小塩真司, 阿部晋吾, カトローニピノ (2012). 日本語版 TIPI-J 作成の試み. パーソナリティ研究, 21(1), 40–52.</a:t>
             </a:r>
@@ -19927,6 +20878,9 @@
                 <a:solidFill>
                   <a:srgbClr val="24303F"/>
                 </a:solidFill>
+                <a:latin typeface="BIZ UDPゴシック"/>
+                <a:ea typeface="BIZ UDPゴシック"/>
+                <a:cs typeface="BIZ UDPゴシック"/>
               </a:rPr>
               <a:t>谷口友梨, 神田朋果 (2025). 推し活の理想と現実の乖離が充実感・精神的健康に及ぼす影響. 人間文化, 58, 2–13.</a:t>
             </a:r>
@@ -19943,6 +20897,9 @@
                 <a:solidFill>
                   <a:srgbClr val="24303F"/>
                 </a:solidFill>
+                <a:latin typeface="BIZ UDPゴシック"/>
+                <a:ea typeface="BIZ UDPゴシック"/>
+                <a:cs typeface="BIZ UDPゴシック"/>
               </a:rPr>
               <a:t>中林春海, 水口崇 (2020). ファン心理やその活動と大学生の心理的健康の関係. 信州心理臨床紀要, 19, 33–55.</a:t>
             </a:r>
@@ -19959,6 +20916,9 @@
                 <a:solidFill>
                   <a:srgbClr val="24303F"/>
                 </a:solidFill>
+                <a:latin typeface="BIZ UDPゴシック"/>
+                <a:ea typeface="BIZ UDPゴシック"/>
+                <a:cs typeface="BIZ UDPゴシック"/>
               </a:rPr>
               <a:t>野村総合研究所 (2025). 拡大する「推し活」市場のポテンシャルとビジネスの可能性.</a:t>
             </a:r>
@@ -20011,6 +20971,9 @@
                 <a:solidFill>
                   <a:srgbClr val="24303F"/>
                 </a:solidFill>
+                <a:latin typeface="BIZ UDPゴシック"/>
+                <a:ea typeface="BIZ UDPゴシック"/>
+                <a:cs typeface="BIZ UDPゴシック"/>
               </a:rPr>
               <a:t>背景①：推し活は社会現象に</a:t>
             </a:r>
@@ -20029,9 +20992,14 @@
         </p:nvSpPr>
         <p:spPr/>
         <p:txBody>
-          <a:bodyPr/>
-          <a:p>
-            <a:r>
+          <a:bodyPr lIns="27432" rIns="0" wrap="none"/>
+          <a:p>
+            <a:r>
+              <a:rPr sz="900">
+                <a:latin typeface="BIZ UDPゴシック"/>
+                <a:ea typeface="BIZ UDPゴシック"/>
+                <a:cs typeface="BIZ UDPゴシック"/>
+              </a:rPr>
               <a:t>2027/2/17</a:t>
             </a:r>
           </a:p>
@@ -20052,7 +21020,11 @@
           <a:bodyPr/>
           <a:p>
             <a:fld id="{B6F15528-21DE-4FAA-801E-634DDDAF4B2B}" type="slidenum">
-              <a:rPr lang="en-US"/>
+              <a:rPr lang="en-US">
+                <a:latin typeface="BIZ UDPゴシック"/>
+                <a:ea typeface="BIZ UDPゴシック"/>
+                <a:cs typeface="BIZ UDPゴシック"/>
+              </a:rPr>
               <a:t>3</a:t>
             </a:fld>
           </a:p>
@@ -20143,6 +21115,9 @@
                 <a:solidFill>
                   <a:srgbClr val="E8457C"/>
                 </a:solidFill>
+                <a:latin typeface="BIZ UDPゴシック"/>
+                <a:ea typeface="BIZ UDPゴシック"/>
+                <a:cs typeface="BIZ UDPゴシック"/>
               </a:rPr>
               <a:t>約3.8兆円</a:t>
             </a:r>
@@ -20182,6 +21157,9 @@
                 <a:solidFill>
                   <a:srgbClr val="24303F"/>
                 </a:solidFill>
+                <a:latin typeface="BIZ UDPゴシック"/>
+                <a:ea typeface="BIZ UDPゴシック"/>
+                <a:cs typeface="BIZ UDPゴシック"/>
               </a:rPr>
               <a:t>広義の推し活市場（野村総合研究所, 2025）</a:t>
             </a:r>
@@ -20273,6 +21251,9 @@
                 <a:solidFill>
                   <a:srgbClr val="0099FF"/>
                 </a:solidFill>
+                <a:latin typeface="BIZ UDPゴシック"/>
+                <a:ea typeface="BIZ UDPゴシック"/>
+                <a:cs typeface="BIZ UDPゴシック"/>
               </a:rPr>
               <a:t>3割超</a:t>
             </a:r>
@@ -20312,6 +21293,9 @@
                 <a:solidFill>
                   <a:srgbClr val="24303F"/>
                 </a:solidFill>
+                <a:latin typeface="BIZ UDPゴシック"/>
+                <a:ea typeface="BIZ UDPゴシック"/>
+                <a:cs typeface="BIZ UDPゴシック"/>
               </a:rPr>
               <a:t>国民のうち推し活をしている人</a:t>
             </a:r>
@@ -20403,6 +21387,9 @@
                 <a:solidFill>
                   <a:srgbClr val="12A38A"/>
                 </a:solidFill>
+                <a:latin typeface="BIZ UDPゴシック"/>
+                <a:ea typeface="BIZ UDPゴシック"/>
+                <a:cs typeface="BIZ UDPゴシック"/>
               </a:rPr>
               <a:t>前向きな効果</a:t>
             </a:r>
@@ -20442,6 +21429,9 @@
                 <a:solidFill>
                   <a:srgbClr val="24303F"/>
                 </a:solidFill>
+                <a:latin typeface="BIZ UDPゴシック"/>
+                <a:ea typeface="BIZ UDPゴシック"/>
+                <a:cs typeface="BIZ UDPゴシック"/>
               </a:rPr>
               <a:t>生きがい・活力・精神的健康の改善（中林・水口, 2020; 西川・渋谷, 2011）</a:t>
             </a:r>
@@ -20549,6 +21539,9 @@
                 <a:solidFill>
                   <a:srgbClr val="CCE9FF"/>
                 </a:solidFill>
+                <a:latin typeface="BIZ UDPゴシック"/>
+                <a:ea typeface="BIZ UDPゴシック"/>
+                <a:cs typeface="BIZ UDPゴシック"/>
               </a:rPr>
               <a:t>推し活とは</a:t>
             </a:r>
@@ -20565,6 +21558,9 @@
                 <a:solidFill>
                   <a:srgbClr val="FFFFFF"/>
                 </a:solidFill>
+                <a:latin typeface="BIZ UDPゴシック"/>
+                <a:ea typeface="BIZ UDPゴシック"/>
+                <a:cs typeface="BIZ UDPゴシック"/>
               </a:rPr>
               <a:t>アイドルやキャラクターなど「推し」を熱心に応援する活動</a:t>
             </a:r>
@@ -20581,6 +21577,9 @@
                 <a:solidFill>
                   <a:srgbClr val="FFFFFF"/>
                 </a:solidFill>
+                <a:latin typeface="BIZ UDPゴシック"/>
+                <a:ea typeface="BIZ UDPゴシック"/>
+                <a:cs typeface="BIZ UDPゴシック"/>
               </a:rPr>
               <a:t>単なる趣味を超えて、アイデンティティや日々の活力の源になっている</a:t>
             </a:r>
@@ -20633,6 +21632,9 @@
                 <a:solidFill>
                   <a:srgbClr val="24303F"/>
                 </a:solidFill>
+                <a:latin typeface="BIZ UDPゴシック"/>
+                <a:ea typeface="BIZ UDPゴシック"/>
+                <a:cs typeface="BIZ UDPゴシック"/>
               </a:rPr>
               <a:t>背景②：「推し疲れ」というパラドックス</a:t>
             </a:r>
@@ -20651,9 +21653,14 @@
         </p:nvSpPr>
         <p:spPr/>
         <p:txBody>
-          <a:bodyPr/>
-          <a:p>
-            <a:r>
+          <a:bodyPr lIns="27432" rIns="0" wrap="none"/>
+          <a:p>
+            <a:r>
+              <a:rPr sz="900">
+                <a:latin typeface="BIZ UDPゴシック"/>
+                <a:ea typeface="BIZ UDPゴシック"/>
+                <a:cs typeface="BIZ UDPゴシック"/>
+              </a:rPr>
               <a:t>2027/2/17</a:t>
             </a:r>
           </a:p>
@@ -20674,7 +21681,11 @@
           <a:bodyPr/>
           <a:p>
             <a:fld id="{B6F15528-21DE-4FAA-801E-634DDDAF4B2B}" type="slidenum">
-              <a:rPr lang="en-US"/>
+              <a:rPr lang="en-US">
+                <a:latin typeface="BIZ UDPゴシック"/>
+                <a:ea typeface="BIZ UDPゴシック"/>
+                <a:cs typeface="BIZ UDPゴシック"/>
+              </a:rPr>
               <a:t>4</a:t>
             </a:fld>
           </a:p>
@@ -20831,6 +21842,9 @@
                 <a:solidFill>
                   <a:srgbClr val="0B3C6E"/>
                 </a:solidFill>
+                <a:latin typeface="BIZ UDPゴシック"/>
+                <a:ea typeface="BIZ UDPゴシック"/>
+                <a:cs typeface="BIZ UDPゴシック"/>
               </a:rPr>
               <a:t>お金と時間の使いすぎ</a:t>
             </a:r>
@@ -20870,6 +21884,9 @@
                 <a:solidFill>
                   <a:srgbClr val="24303F"/>
                 </a:solidFill>
+                <a:latin typeface="BIZ UDPゴシック"/>
+                <a:ea typeface="BIZ UDPゴシック"/>
+                <a:cs typeface="BIZ UDPゴシック"/>
               </a:rPr>
               <a:t>グッズ購入・遠征</a:t>
             </a:r>
@@ -21027,6 +22044,9 @@
                 <a:solidFill>
                   <a:srgbClr val="0B3C6E"/>
                 </a:solidFill>
+                <a:latin typeface="BIZ UDPゴシック"/>
+                <a:ea typeface="BIZ UDPゴシック"/>
+                <a:cs typeface="BIZ UDPゴシック"/>
               </a:rPr>
               <a:t>SNS での比較</a:t>
             </a:r>
@@ -21066,6 +22086,9 @@
                 <a:solidFill>
                   <a:srgbClr val="24303F"/>
                 </a:solidFill>
+                <a:latin typeface="BIZ UDPゴシック"/>
+                <a:ea typeface="BIZ UDPゴシック"/>
+                <a:cs typeface="BIZ UDPゴシック"/>
               </a:rPr>
               <a:t>他のファンと比べて落ち込む</a:t>
             </a:r>
@@ -21223,6 +22246,9 @@
                 <a:solidFill>
                   <a:srgbClr val="0B3C6E"/>
                 </a:solidFill>
+                <a:latin typeface="BIZ UDPゴシック"/>
+                <a:ea typeface="BIZ UDPゴシック"/>
+                <a:cs typeface="BIZ UDPゴシック"/>
               </a:rPr>
               <a:t>義務感による燃え尽き</a:t>
             </a:r>
@@ -21262,6 +22288,9 @@
                 <a:solidFill>
                   <a:srgbClr val="24303F"/>
                 </a:solidFill>
+                <a:latin typeface="BIZ UDPゴシック"/>
+                <a:ea typeface="BIZ UDPゴシック"/>
+                <a:cs typeface="BIZ UDPゴシック"/>
               </a:rPr>
               <a:t>「追わなければ」という負担</a:t>
             </a:r>
@@ -21345,6 +22374,9 @@
                 <a:solidFill>
                   <a:srgbClr val="E07A10"/>
                 </a:solidFill>
+                <a:latin typeface="BIZ UDPゴシック"/>
+                <a:ea typeface="BIZ UDPゴシック"/>
+                <a:cs typeface="BIZ UDPゴシック"/>
               </a:rPr>
               <a:t>ウェルビーイングのパラドックス</a:t>
             </a:r>
@@ -21361,6 +22393,9 @@
                 <a:solidFill>
                   <a:srgbClr val="24303F"/>
                 </a:solidFill>
+                <a:latin typeface="BIZ UDPゴシック"/>
+                <a:ea typeface="BIZ UDPゴシック"/>
+                <a:cs typeface="BIZ UDPゴシック"/>
               </a:rPr>
               <a:t>幸せになるための活動が、キャパシティを超えるとストレスに変わる。理想と現実の推し活の乖離は精神的健康を損なう（谷口・神田, 2025）</a:t>
             </a:r>
@@ -21510,6 +22545,9 @@
                 <a:solidFill>
                   <a:srgbClr val="0B3C6E"/>
                 </a:solidFill>
+                <a:latin typeface="BIZ UDPゴシック"/>
+                <a:ea typeface="BIZ UDPゴシック"/>
+                <a:cs typeface="BIZ UDPゴシック"/>
               </a:rPr>
               <a:t>精神疾患の患者数は 2017年 約389万人 → 2020年 約586万人</a:t>
             </a:r>
@@ -21526,6 +22564,9 @@
                 <a:solidFill>
                   <a:srgbClr val="24303F"/>
                 </a:solidFill>
+                <a:latin typeface="BIZ UDPゴシック"/>
+                <a:ea typeface="BIZ UDPゴシック"/>
+                <a:cs typeface="BIZ UDPゴシック"/>
               </a:rPr>
               <a:t>日常的なストレスへの対処は若い世代で特に課題（厚生労働省；山岸, 2009）</a:t>
             </a:r>
@@ -21578,6 +22619,9 @@
                 <a:solidFill>
                   <a:srgbClr val="24303F"/>
                 </a:solidFill>
+                <a:latin typeface="BIZ UDPゴシック"/>
+                <a:ea typeface="BIZ UDPゴシック"/>
+                <a:cs typeface="BIZ UDPゴシック"/>
               </a:rPr>
               <a:t>背景③：これまでの支援の限界</a:t>
             </a:r>
@@ -21596,9 +22640,14 @@
         </p:nvSpPr>
         <p:spPr/>
         <p:txBody>
-          <a:bodyPr/>
-          <a:p>
-            <a:r>
+          <a:bodyPr lIns="27432" rIns="0" wrap="none"/>
+          <a:p>
+            <a:r>
+              <a:rPr sz="900">
+                <a:latin typeface="BIZ UDPゴシック"/>
+                <a:ea typeface="BIZ UDPゴシック"/>
+                <a:cs typeface="BIZ UDPゴシック"/>
+              </a:rPr>
               <a:t>2027/2/17</a:t>
             </a:r>
           </a:p>
@@ -21619,7 +22668,11 @@
           <a:bodyPr/>
           <a:p>
             <a:fld id="{B6F15528-21DE-4FAA-801E-634DDDAF4B2B}" type="slidenum">
-              <a:rPr lang="en-US"/>
+              <a:rPr lang="en-US">
+                <a:latin typeface="BIZ UDPゴシック"/>
+                <a:ea typeface="BIZ UDPゴシック"/>
+                <a:cs typeface="BIZ UDPゴシック"/>
+              </a:rPr>
               <a:t>5</a:t>
             </a:fld>
           </a:p>
@@ -21776,6 +22829,9 @@
                 <a:solidFill>
                   <a:srgbClr val="0B3C6E"/>
                 </a:solidFill>
+                <a:latin typeface="BIZ UDPゴシック"/>
+                <a:ea typeface="BIZ UDPゴシック"/>
+                <a:cs typeface="BIZ UDPゴシック"/>
               </a:rPr>
               <a:t>一律の自己管理</a:t>
             </a:r>
@@ -21792,6 +22848,9 @@
                 <a:solidFill>
                   <a:srgbClr val="24303F"/>
                 </a:solidFill>
+                <a:latin typeface="BIZ UDPゴシック"/>
+                <a:ea typeface="BIZ UDPゴシック"/>
+                <a:cs typeface="BIZ UDPゴシック"/>
               </a:rPr>
               <a:t>「お金を使いすぎない」「SNSから離れる」。何が喜びで何が負担かは人によって違う</a:t>
             </a:r>
@@ -21949,6 +23008,9 @@
                 <a:solidFill>
                   <a:srgbClr val="0B3C6E"/>
                 </a:solidFill>
+                <a:latin typeface="BIZ UDPゴシック"/>
+                <a:ea typeface="BIZ UDPゴシック"/>
+                <a:cs typeface="BIZ UDPゴシック"/>
               </a:rPr>
               <a:t>データを見せるだけ</a:t>
             </a:r>
@@ -21965,6 +23027,9 @@
                 <a:solidFill>
                   <a:srgbClr val="24303F"/>
                 </a:solidFill>
+                <a:latin typeface="BIZ UDPゴシック"/>
+                <a:ea typeface="BIZ UDPゴシック"/>
+                <a:cs typeface="BIZ UDPゴシック"/>
               </a:rPr>
               <a:t>家計簿やスクリーンタイムは記録を見せるが、行動は変わりにくい（Choe et al., 2014）</a:t>
             </a:r>
@@ -22122,6 +23187,9 @@
                 <a:solidFill>
                   <a:srgbClr val="0B3C6E"/>
                 </a:solidFill>
+                <a:latin typeface="BIZ UDPゴシック"/>
+                <a:ea typeface="BIZ UDPゴシック"/>
+                <a:cs typeface="BIZ UDPゴシック"/>
               </a:rPr>
               <a:t>専門的なケアの壁</a:t>
             </a:r>
@@ -22138,6 +23206,9 @@
                 <a:solidFill>
                   <a:srgbClr val="24303F"/>
                 </a:solidFill>
+                <a:latin typeface="BIZ UDPゴシック"/>
+                <a:ea typeface="BIZ UDPゴシック"/>
+                <a:cs typeface="BIZ UDPゴシック"/>
               </a:rPr>
               <a:t>カウンセリングの利用率はわずか6%。「支援のギャップ」（OECD, 2022）</a:t>
             </a:r>
@@ -22221,6 +23292,9 @@
                 <a:solidFill>
                   <a:srgbClr val="FFFFFF"/>
                 </a:solidFill>
+                <a:latin typeface="BIZ UDPゴシック"/>
+                <a:ea typeface="BIZ UDPゴシック"/>
+                <a:cs typeface="BIZ UDPゴシック"/>
               </a:rPr>
               <a:t>→ 個人に合わせて、本人が気づきにくい「将来の見込み」を見せる支援が必要</a:t>
             </a:r>
@@ -22237,6 +23311,9 @@
                 <a:solidFill>
                   <a:srgbClr val="FFFFFF"/>
                 </a:solidFill>
+                <a:latin typeface="BIZ UDPゴシック"/>
+                <a:ea typeface="BIZ UDPゴシック"/>
+                <a:cs typeface="BIZ UDPゴシック"/>
               </a:rPr>
               <a:t>手がかり：自分に似たアバターで行動が変わる（プロテウス効果・未来の自分の提示）</a:t>
             </a:r>
@@ -22289,6 +23366,9 @@
                 <a:solidFill>
                   <a:srgbClr val="24303F"/>
                 </a:solidFill>
+                <a:latin typeface="BIZ UDPゴシック"/>
+                <a:ea typeface="BIZ UDPゴシック"/>
+                <a:cs typeface="BIZ UDPゴシック"/>
               </a:rPr>
               <a:t>予備調査（2026年5〜6月・215名）</a:t>
             </a:r>
@@ -22307,9 +23387,14 @@
         </p:nvSpPr>
         <p:spPr/>
         <p:txBody>
-          <a:bodyPr/>
-          <a:p>
-            <a:r>
+          <a:bodyPr lIns="27432" rIns="0" wrap="none"/>
+          <a:p>
+            <a:r>
+              <a:rPr sz="900">
+                <a:latin typeface="BIZ UDPゴシック"/>
+                <a:ea typeface="BIZ UDPゴシック"/>
+                <a:cs typeface="BIZ UDPゴシック"/>
+              </a:rPr>
               <a:t>2027/2/17</a:t>
             </a:r>
           </a:p>
@@ -22330,7 +23415,11 @@
           <a:bodyPr/>
           <a:p>
             <a:fld id="{B6F15528-21DE-4FAA-801E-634DDDAF4B2B}" type="slidenum">
-              <a:rPr lang="en-US"/>
+              <a:rPr lang="en-US">
+                <a:latin typeface="BIZ UDPゴシック"/>
+                <a:ea typeface="BIZ UDPゴシック"/>
+                <a:cs typeface="BIZ UDPゴシック"/>
+              </a:rPr>
               <a:t>6</a:t>
             </a:fld>
           </a:p>
@@ -22421,6 +23510,9 @@
                 <a:solidFill>
                   <a:srgbClr val="12A38A"/>
                 </a:solidFill>
+                <a:latin typeface="BIZ UDPゴシック"/>
+                <a:ea typeface="BIZ UDPゴシック"/>
+                <a:cs typeface="BIZ UDPゴシック"/>
               </a:rPr>
               <a:t>約8割</a:t>
             </a:r>
@@ -22460,6 +23552,9 @@
                 <a:solidFill>
                   <a:srgbClr val="24303F"/>
                 </a:solidFill>
+                <a:latin typeface="BIZ UDPゴシック"/>
+                <a:ea typeface="BIZ UDPゴシック"/>
+                <a:cs typeface="BIZ UDPゴシック"/>
               </a:rPr>
               <a:t>推しが生きがい</a:t>
             </a:r>
@@ -22551,6 +23646,9 @@
                 <a:solidFill>
                   <a:srgbClr val="E07A10"/>
                 </a:solidFill>
+                <a:latin typeface="BIZ UDPゴシック"/>
+                <a:ea typeface="BIZ UDPゴシック"/>
+                <a:cs typeface="BIZ UDPゴシック"/>
               </a:rPr>
               <a:t>約4割</a:t>
             </a:r>
@@ -22590,6 +23688,9 @@
                 <a:solidFill>
                   <a:srgbClr val="24303F"/>
                 </a:solidFill>
+                <a:latin typeface="BIZ UDPゴシック"/>
+                <a:ea typeface="BIZ UDPゴシック"/>
+                <a:cs typeface="BIZ UDPゴシック"/>
               </a:rPr>
               <a:t>出費に不安</a:t>
             </a:r>
@@ -22681,6 +23782,9 @@
                 <a:solidFill>
                   <a:srgbClr val="7C6BC4"/>
                 </a:solidFill>
+                <a:latin typeface="BIZ UDPゴシック"/>
+                <a:ea typeface="BIZ UDPゴシック"/>
+                <a:cs typeface="BIZ UDPゴシック"/>
               </a:rPr>
               <a:t>約3割</a:t>
             </a:r>
@@ -22720,6 +23824,9 @@
                 <a:solidFill>
                   <a:srgbClr val="24303F"/>
                 </a:solidFill>
+                <a:latin typeface="BIZ UDPゴシック"/>
+                <a:ea typeface="BIZ UDPゴシック"/>
+                <a:cs typeface="BIZ UDPゴシック"/>
               </a:rPr>
               <a:t>睡眠に支障</a:t>
             </a:r>
@@ -22821,6 +23928,9 @@
                 <a:solidFill>
                   <a:srgbClr val="E07A10"/>
                 </a:solidFill>
+                <a:latin typeface="BIZ UDPゴシック"/>
+                <a:ea typeface="BIZ UDPゴシック"/>
+                <a:cs typeface="BIZ UDPゴシック"/>
               </a:rPr>
               <a:t>27%</a:t>
             </a:r>
@@ -22837,6 +23947,9 @@
                 <a:solidFill>
                   <a:srgbClr val="0B3C6E"/>
                 </a:solidFill>
+                <a:latin typeface="BIZ UDPゴシック"/>
+                <a:ea typeface="BIZ UDPゴシック"/>
+                <a:cs typeface="BIZ UDPゴシック"/>
               </a:rPr>
               <a:t>「充実も疲れも高い」人がいる</a:t>
             </a:r>
@@ -22853,6 +23966,9 @@
                 <a:solidFill>
                   <a:srgbClr val="24303F"/>
                 </a:solidFill>
+                <a:latin typeface="BIZ UDPゴシック"/>
+                <a:ea typeface="BIZ UDPゴシック"/>
+                <a:cs typeface="BIZ UDPゴシック"/>
               </a:rPr>
               <a:t>同じ行動が、充実と推し疲れの両方を押し上げる</a:t>
             </a:r>
@@ -22923,6 +24039,9 @@
                 <a:solidFill>
                   <a:srgbClr val="24303F"/>
                 </a:solidFill>
+                <a:latin typeface="BIZ UDPゴシック"/>
+                <a:ea typeface="BIZ UDPゴシック"/>
+                <a:cs typeface="BIZ UDPゴシック"/>
               </a:rPr>
               <a:t>研究目的と研究課題</a:t>
             </a:r>
@@ -22941,9 +24060,14 @@
         </p:nvSpPr>
         <p:spPr/>
         <p:txBody>
-          <a:bodyPr/>
-          <a:p>
-            <a:r>
+          <a:bodyPr lIns="27432" rIns="0" wrap="none"/>
+          <a:p>
+            <a:r>
+              <a:rPr sz="900">
+                <a:latin typeface="BIZ UDPゴシック"/>
+                <a:ea typeface="BIZ UDPゴシック"/>
+                <a:cs typeface="BIZ UDPゴシック"/>
+              </a:rPr>
               <a:t>2027/2/17</a:t>
             </a:r>
           </a:p>
@@ -22964,7 +24088,11 @@
           <a:bodyPr/>
           <a:p>
             <a:fld id="{B6F15528-21DE-4FAA-801E-634DDDAF4B2B}" type="slidenum">
-              <a:rPr lang="en-US"/>
+              <a:rPr lang="en-US">
+                <a:latin typeface="BIZ UDPゴシック"/>
+                <a:ea typeface="BIZ UDPゴシック"/>
+                <a:cs typeface="BIZ UDPゴシック"/>
+              </a:rPr>
               <a:t>7</a:t>
             </a:fld>
           </a:p>
@@ -23047,6 +24175,9 @@
                 <a:solidFill>
                   <a:srgbClr val="CCE9FF"/>
                 </a:solidFill>
+                <a:latin typeface="BIZ UDPゴシック"/>
+                <a:ea typeface="BIZ UDPゴシック"/>
+                <a:cs typeface="BIZ UDPゴシック"/>
               </a:rPr>
               <a:t>目的</a:t>
             </a:r>
@@ -23063,6 +24194,9 @@
                 <a:solidFill>
                   <a:srgbClr val="FFFFFF"/>
                 </a:solidFill>
+                <a:latin typeface="BIZ UDPゴシック"/>
+                <a:ea typeface="BIZ UDPゴシック"/>
+                <a:cs typeface="BIZ UDPゴシック"/>
               </a:rPr>
               <a:t>個人の記録にもとづく予測と、自分に似たアバターによる将来像の提示を統合し、推し活の行動変容とウェルビーイングの向上を促せるかを、無作為化比較実験で検証する</a:t>
             </a:r>
@@ -23176,6 +24310,9 @@
                 <a:solidFill>
                   <a:srgbClr val="FFFFFF"/>
                 </a:solidFill>
+                <a:latin typeface="BIZ UDPゴシック"/>
+                <a:ea typeface="BIZ UDPゴシック"/>
+                <a:cs typeface="BIZ UDPゴシック"/>
               </a:rPr>
               <a:t>RQ1</a:t>
             </a:r>
@@ -23215,6 +24352,9 @@
                 <a:solidFill>
                   <a:srgbClr val="24303F"/>
                 </a:solidFill>
+                <a:latin typeface="BIZ UDPゴシック"/>
+                <a:ea typeface="BIZ UDPゴシック"/>
+                <a:cs typeface="BIZ UDPゴシック"/>
               </a:rPr>
               <a:t>性格特性と推し活の行動から、充実と推し疲れを個人ごとにどの程度の精度で予測できるか</a:t>
             </a:r>
@@ -23328,6 +24468,9 @@
                 <a:solidFill>
                   <a:srgbClr val="FFFFFF"/>
                 </a:solidFill>
+                <a:latin typeface="BIZ UDPゴシック"/>
+                <a:ea typeface="BIZ UDPゴシック"/>
+                <a:cs typeface="BIZ UDPゴシック"/>
               </a:rPr>
               <a:t>RQ2</a:t>
             </a:r>
@@ -23367,6 +24510,9 @@
                 <a:solidFill>
                   <a:srgbClr val="24303F"/>
                 </a:solidFill>
+                <a:latin typeface="BIZ UDPゴシック"/>
+                <a:ea typeface="BIZ UDPゴシック"/>
+                <a:cs typeface="BIZ UDPゴシック"/>
               </a:rPr>
               <a:t>自分に似たアバターで将来の見込みを見せると、同じ提案を文章で見せる場合より実行が増えるか</a:t>
             </a:r>
@@ -23480,6 +24626,9 @@
                 <a:solidFill>
                   <a:srgbClr val="FFFFFF"/>
                 </a:solidFill>
+                <a:latin typeface="BIZ UDPゴシック"/>
+                <a:ea typeface="BIZ UDPゴシック"/>
+                <a:cs typeface="BIZ UDPゴシック"/>
               </a:rPr>
               <a:t>RQ3</a:t>
             </a:r>
@@ -23519,6 +24668,9 @@
                 <a:solidFill>
                   <a:srgbClr val="24303F"/>
                 </a:solidFill>
+                <a:latin typeface="BIZ UDPゴシック"/>
+                <a:ea typeface="BIZ UDPゴシック"/>
+                <a:cs typeface="BIZ UDPゴシック"/>
               </a:rPr>
               <a:t>6週間の利用で、推し活に伴うストレスが減り、ウェルビーイングが上がるか</a:t>
             </a:r>
@@ -23571,6 +24723,9 @@
                 <a:solidFill>
                   <a:srgbClr val="24303F"/>
                 </a:solidFill>
+                <a:latin typeface="BIZ UDPゴシック"/>
+                <a:ea typeface="BIZ UDPゴシック"/>
+                <a:cs typeface="BIZ UDPゴシック"/>
               </a:rPr>
               <a:t>関連研究と本研究の位置づけ</a:t>
             </a:r>
@@ -23589,9 +24744,14 @@
         </p:nvSpPr>
         <p:spPr/>
         <p:txBody>
-          <a:bodyPr/>
-          <a:p>
-            <a:r>
+          <a:bodyPr lIns="27432" rIns="0" wrap="none"/>
+          <a:p>
+            <a:r>
+              <a:rPr sz="900">
+                <a:latin typeface="BIZ UDPゴシック"/>
+                <a:ea typeface="BIZ UDPゴシック"/>
+                <a:cs typeface="BIZ UDPゴシック"/>
+              </a:rPr>
               <a:t>2027/2/17</a:t>
             </a:r>
           </a:p>
@@ -23612,7 +24772,11 @@
           <a:bodyPr/>
           <a:p>
             <a:fld id="{B6F15528-21DE-4FAA-801E-634DDDAF4B2B}" type="slidenum">
-              <a:rPr lang="en-US"/>
+              <a:rPr lang="en-US">
+                <a:latin typeface="BIZ UDPゴシック"/>
+                <a:ea typeface="BIZ UDPゴシック"/>
+                <a:cs typeface="BIZ UDPゴシック"/>
+              </a:rPr>
               <a:t>8</a:t>
             </a:fld>
           </a:p>
@@ -23769,6 +24933,9 @@
                 <a:solidFill>
                   <a:srgbClr val="0B3C6E"/>
                 </a:solidFill>
+                <a:latin typeface="BIZ UDPゴシック"/>
+                <a:ea typeface="BIZ UDPゴシック"/>
+                <a:cs typeface="BIZ UDPゴシック"/>
               </a:rPr>
               <a:t>個人情報学</a:t>
             </a:r>
@@ -23808,6 +24975,9 @@
                 <a:solidFill>
                   <a:srgbClr val="5A6676"/>
                 </a:solidFill>
+                <a:latin typeface="BIZ UDPゴシック"/>
+                <a:ea typeface="BIZ UDPゴシック"/>
+                <a:cs typeface="BIZ UDPゴシック"/>
               </a:rPr>
               <a:t>self-tracking</a:t>
             </a:r>
@@ -23847,6 +25017,9 @@
                 <a:solidFill>
                   <a:srgbClr val="24303F"/>
                 </a:solidFill>
+                <a:latin typeface="BIZ UDPゴシック"/>
+                <a:ea typeface="BIZ UDPゴシック"/>
+                <a:cs typeface="BIZ UDPゴシック"/>
               </a:rPr>
               <a:t>記録の可視化。見せるだけでは行動が変わりにくい（Choe et al., 2014）</a:t>
             </a:r>
@@ -24004,6 +25177,9 @@
                 <a:solidFill>
                   <a:srgbClr val="0B3C6E"/>
                 </a:solidFill>
+                <a:latin typeface="BIZ UDPゴシック"/>
+                <a:ea typeface="BIZ UDPゴシック"/>
+                <a:cs typeface="BIZ UDPゴシック"/>
               </a:rPr>
               <a:t>行動変容とアバター</a:t>
             </a:r>
@@ -24043,6 +25219,9 @@
                 <a:solidFill>
                   <a:srgbClr val="5A6676"/>
                 </a:solidFill>
+                <a:latin typeface="BIZ UDPゴシック"/>
+                <a:ea typeface="BIZ UDPゴシック"/>
+                <a:cs typeface="BIZ UDPゴシック"/>
               </a:rPr>
               <a:t>persuasive tech</a:t>
             </a:r>
@@ -24082,6 +25261,9 @@
                 <a:solidFill>
                   <a:srgbClr val="24303F"/>
                 </a:solidFill>
+                <a:latin typeface="BIZ UDPゴシック"/>
+                <a:ea typeface="BIZ UDPゴシック"/>
+                <a:cs typeface="BIZ UDPゴシック"/>
               </a:rPr>
               <a:t>自分に似たアバターで運動・貯蓄が増える（Fox &amp; Bailenson, 2009; Hershfield et al., 2011）</a:t>
             </a:r>
@@ -24239,6 +25421,9 @@
                 <a:solidFill>
                   <a:srgbClr val="0B3C6E"/>
                 </a:solidFill>
+                <a:latin typeface="BIZ UDPゴシック"/>
+                <a:ea typeface="BIZ UDPゴシック"/>
+                <a:cs typeface="BIZ UDPゴシック"/>
               </a:rPr>
               <a:t>推し活の研究</a:t>
             </a:r>
@@ -24278,6 +25463,9 @@
                 <a:solidFill>
                   <a:srgbClr val="5A6676"/>
                 </a:solidFill>
+                <a:latin typeface="BIZ UDPゴシック"/>
+                <a:ea typeface="BIZ UDPゴシック"/>
+                <a:cs typeface="BIZ UDPゴシック"/>
               </a:rPr>
               <a:t>fandom</a:t>
             </a:r>
@@ -24317,6 +25505,9 @@
                 <a:solidFill>
                   <a:srgbClr val="24303F"/>
                 </a:solidFill>
+                <a:latin typeface="BIZ UDPゴシック"/>
+                <a:ea typeface="BIZ UDPゴシック"/>
+                <a:cs typeface="BIZ UDPゴシック"/>
               </a:rPr>
               <a:t>充実感・精神的健康との関係。いずれも横断調査（中林・水口, 2020; 谷口・神田, 2025）</a:t>
             </a:r>
@@ -24400,6 +25591,9 @@
                 <a:solidFill>
                   <a:srgbClr val="CCE9FF"/>
                 </a:solidFill>
+                <a:latin typeface="BIZ UDPゴシック"/>
+                <a:ea typeface="BIZ UDPゴシック"/>
+                <a:cs typeface="BIZ UDPゴシック"/>
               </a:rPr>
               <a:t>本研究の新しさ</a:t>
             </a:r>
@@ -24416,6 +25610,9 @@
                 <a:solidFill>
                   <a:srgbClr val="FFFFFF"/>
                 </a:solidFill>
+                <a:latin typeface="BIZ UDPゴシック"/>
+                <a:ea typeface="BIZ UDPゴシック"/>
+                <a:cs typeface="BIZ UDPゴシック"/>
               </a:rPr>
               <a:t>① 正解が人によって違う「推し活」にアバター介入を適用</a:t>
             </a:r>
@@ -24432,6 +25629,9 @@
                 <a:solidFill>
                   <a:srgbClr val="FFFFFF"/>
                 </a:solidFill>
+                <a:latin typeface="BIZ UDPゴシック"/>
+                <a:ea typeface="BIZ UDPゴシック"/>
+                <a:cs typeface="BIZ UDPゴシック"/>
               </a:rPr>
               <a:t>② 予測の不確かさそのものを「ありうる自分」の重なりとして見せる</a:t>
             </a:r>
@@ -24448,6 +25648,9 @@
                 <a:solidFill>
                   <a:srgbClr val="FFFFFF"/>
                 </a:solidFill>
+                <a:latin typeface="BIZ UDPゴシック"/>
+                <a:ea typeface="BIZ UDPゴシック"/>
+                <a:cs typeface="BIZ UDPゴシック"/>
               </a:rPr>
               <a:t>③ 提案を行ったあとの変化を、無作為化比較実験で追跡</a:t>
             </a:r>
@@ -24500,6 +25703,9 @@
                 <a:solidFill>
                   <a:srgbClr val="24303F"/>
                 </a:solidFill>
+                <a:latin typeface="BIZ UDPゴシック"/>
+                <a:ea typeface="BIZ UDPゴシック"/>
+                <a:cs typeface="BIZ UDPゴシック"/>
               </a:rPr>
               <a:t>提案システム OshiFit の全体像</a:t>
             </a:r>
@@ -24518,9 +25724,14 @@
         </p:nvSpPr>
         <p:spPr/>
         <p:txBody>
-          <a:bodyPr/>
-          <a:p>
-            <a:r>
+          <a:bodyPr lIns="27432" rIns="0" wrap="none"/>
+          <a:p>
+            <a:r>
+              <a:rPr sz="900">
+                <a:latin typeface="BIZ UDPゴシック"/>
+                <a:ea typeface="BIZ UDPゴシック"/>
+                <a:cs typeface="BIZ UDPゴシック"/>
+              </a:rPr>
               <a:t>2027/2/17</a:t>
             </a:r>
           </a:p>
@@ -24541,7 +25752,11 @@
           <a:bodyPr/>
           <a:p>
             <a:fld id="{B6F15528-21DE-4FAA-801E-634DDDAF4B2B}" type="slidenum">
-              <a:rPr lang="en-US"/>
+              <a:rPr lang="en-US">
+                <a:latin typeface="BIZ UDPゴシック"/>
+                <a:ea typeface="BIZ UDPゴシック"/>
+                <a:cs typeface="BIZ UDPゴシック"/>
+              </a:rPr>
               <a:t>9</a:t>
             </a:fld>
           </a:p>
@@ -24698,6 +25913,9 @@
                 <a:solidFill>
                   <a:srgbClr val="0B3C6E"/>
                 </a:solidFill>
+                <a:latin typeface="BIZ UDPゴシック"/>
+                <a:ea typeface="BIZ UDPゴシック"/>
+                <a:cs typeface="BIZ UDPゴシック"/>
               </a:rPr>
               <a:t>TIPI-J</a:t>
             </a:r>
@@ -24714,6 +25932,9 @@
                 <a:solidFill>
                   <a:srgbClr val="5A6676"/>
                 </a:solidFill>
+                <a:latin typeface="BIZ UDPゴシック"/>
+                <a:ea typeface="BIZ UDPゴシック"/>
+                <a:cs typeface="BIZ UDPゴシック"/>
               </a:rPr>
               <a:t>初回・約1分</a:t>
             </a:r>
@@ -24871,6 +26092,9 @@
                 <a:solidFill>
                   <a:srgbClr val="0B3C6E"/>
                 </a:solidFill>
+                <a:latin typeface="BIZ UDPゴシック"/>
+                <a:ea typeface="BIZ UDPゴシック"/>
+                <a:cs typeface="BIZ UDPゴシック"/>
               </a:rPr>
               <a:t>毎日の記録</a:t>
             </a:r>
@@ -24887,6 +26111,9 @@
                 <a:solidFill>
                   <a:srgbClr val="5A6676"/>
                 </a:solidFill>
+                <a:latin typeface="BIZ UDPゴシック"/>
+                <a:ea typeface="BIZ UDPゴシック"/>
+                <a:cs typeface="BIZ UDPゴシック"/>
               </a:rPr>
               <a:t>1日約30秒</a:t>
             </a:r>
@@ -25044,6 +26271,9 @@
                 <a:solidFill>
                   <a:srgbClr val="0B3C6E"/>
                 </a:solidFill>
+                <a:latin typeface="BIZ UDPゴシック"/>
+                <a:ea typeface="BIZ UDPゴシック"/>
+                <a:cs typeface="BIZ UDPゴシック"/>
               </a:rPr>
               <a:t>本人の希望</a:t>
             </a:r>
@@ -25060,6 +26290,9 @@
                 <a:solidFill>
                   <a:srgbClr val="5A6676"/>
                 </a:solidFill>
+                <a:latin typeface="BIZ UDPゴシック"/>
+                <a:ea typeface="BIZ UDPゴシック"/>
+                <a:cs typeface="BIZ UDPゴシック"/>
               </a:rPr>
               <a:t>増やしたい／減らしたい</a:t>
             </a:r>
@@ -25149,6 +26382,9 @@
                 <a:solidFill>
                   <a:srgbClr val="FFFFFF"/>
                 </a:solidFill>
+                <a:latin typeface="BIZ UDPゴシック"/>
+                <a:ea typeface="BIZ UDPゴシック"/>
+                <a:cs typeface="BIZ UDPゴシック"/>
               </a:rPr>
               <a:t>①</a:t>
             </a:r>
@@ -25188,6 +26424,9 @@
                 <a:solidFill>
                   <a:srgbClr val="FFFFFF"/>
                 </a:solidFill>
+                <a:latin typeface="BIZ UDPゴシック"/>
+                <a:ea typeface="BIZ UDPゴシック"/>
+                <a:cs typeface="BIZ UDPゴシック"/>
               </a:rPr>
               <a:t>ベイズ個人ツイン</a:t>
             </a:r>
@@ -25227,6 +26466,9 @@
                 <a:solidFill>
                   <a:srgbClr val="FFFFFF"/>
                 </a:solidFill>
+                <a:latin typeface="BIZ UDPゴシック"/>
+                <a:ea typeface="BIZ UDPゴシック"/>
+                <a:cs typeface="BIZ UDPゴシック"/>
               </a:rPr>
               <a:t>記録で毎晩更新する</a:t>
             </a:r>
@@ -25243,6 +26485,9 @@
                 <a:solidFill>
                   <a:srgbClr val="FFFFFF"/>
                 </a:solidFill>
+                <a:latin typeface="BIZ UDPゴシック"/>
+                <a:ea typeface="BIZ UDPゴシック"/>
+                <a:cs typeface="BIZ UDPゴシック"/>
               </a:rPr>
               <a:t>自分専用の予測</a:t>
             </a:r>
@@ -25332,6 +26577,9 @@
                 <a:solidFill>
                   <a:srgbClr val="FFFFFF"/>
                 </a:solidFill>
+                <a:latin typeface="BIZ UDPゴシック"/>
+                <a:ea typeface="BIZ UDPゴシック"/>
+                <a:cs typeface="BIZ UDPゴシック"/>
               </a:rPr>
               <a:t>②</a:t>
             </a:r>
@@ -25371,6 +26619,9 @@
                 <a:solidFill>
                   <a:srgbClr val="FFFFFF"/>
                 </a:solidFill>
+                <a:latin typeface="BIZ UDPゴシック"/>
+                <a:ea typeface="BIZ UDPゴシック"/>
+                <a:cs typeface="BIZ UDPゴシック"/>
               </a:rPr>
               <a:t>リバランス提案</a:t>
             </a:r>
@@ -25410,6 +26661,9 @@
                 <a:solidFill>
                   <a:srgbClr val="FFFFFF"/>
                 </a:solidFill>
+                <a:latin typeface="BIZ UDPゴシック"/>
+                <a:ea typeface="BIZ UDPゴシック"/>
+                <a:cs typeface="BIZ UDPゴシック"/>
               </a:rPr>
               <a:t>減らさず組み替える</a:t>
             </a:r>
@@ -25426,6 +26680,9 @@
                 <a:solidFill>
                   <a:srgbClr val="FFFFFF"/>
                 </a:solidFill>
+                <a:latin typeface="BIZ UDPゴシック"/>
+                <a:ea typeface="BIZ UDPゴシック"/>
+                <a:cs typeface="BIZ UDPゴシック"/>
               </a:rPr>
               <a:t>3案（パレート最適）</a:t>
             </a:r>
@@ -25637,6 +26894,9 @@
                 <a:solidFill>
                   <a:srgbClr val="12A38A"/>
                 </a:solidFill>
+                <a:latin typeface="BIZ UDPゴシック"/>
+                <a:ea typeface="BIZ UDPゴシック"/>
+                <a:cs typeface="BIZ UDPゴシック"/>
               </a:rPr>
               <a:t>③④ みらいミラー</a:t>
             </a:r>
@@ -25724,6 +26984,9 @@
                 <a:solidFill>
                   <a:srgbClr val="E07A10"/>
                 </a:solidFill>
+                <a:latin typeface="BIZ UDPゴシック"/>
+                <a:ea typeface="BIZ UDPゴシック"/>
+                <a:cs typeface="BIZ UDPゴシック"/>
               </a:rPr>
               <a:t>今のまま</a:t>
             </a:r>
@@ -25763,6 +27026,9 @@
                 <a:solidFill>
                   <a:srgbClr val="12A38A"/>
                 </a:solidFill>
+                <a:latin typeface="BIZ UDPゴシック"/>
+                <a:ea typeface="BIZ UDPゴシック"/>
+                <a:cs typeface="BIZ UDPゴシック"/>
               </a:rPr>
               <a:t>提案どおり</a:t>
             </a:r>
@@ -25802,6 +27068,9 @@
                 <a:solidFill>
                   <a:srgbClr val="0B3C6E"/>
                 </a:solidFill>
+                <a:latin typeface="BIZ UDPゴシック"/>
+                <a:ea typeface="BIZ UDPゴシック"/>
+                <a:cs typeface="BIZ UDPゴシック"/>
               </a:rPr>
               <a:t>ゆらぎアバター</a:t>
             </a:r>
@@ -25818,6 +27087,9 @@
                 <a:solidFill>
                   <a:srgbClr val="24303F"/>
                 </a:solidFill>
+                <a:latin typeface="BIZ UDPゴシック"/>
+                <a:ea typeface="BIZ UDPゴシック"/>
+                <a:cs typeface="BIZ UDPゴシック"/>
               </a:rPr>
               <a:t>予測の幅を重なりで表示</a:t>
             </a:r>
@@ -25834,6 +27106,9 @@
                 <a:solidFill>
                   <a:srgbClr val="0B3C6E"/>
                 </a:solidFill>
+                <a:latin typeface="BIZ UDPゴシック"/>
+                <a:ea typeface="BIZ UDPゴシック"/>
+                <a:cs typeface="BIZ UDPゴシック"/>
               </a:rPr>
               <a:t>疲れの中身キュー</a:t>
             </a:r>
@@ -25850,6 +27125,9 @@
                 <a:solidFill>
                   <a:srgbClr val="24303F"/>
                 </a:solidFill>
+                <a:latin typeface="BIZ UDPゴシック"/>
+                <a:ea typeface="BIZ UDPゴシック"/>
+                <a:cs typeface="BIZ UDPゴシック"/>
               </a:rPr>
               <a:t>睡眠・出費・義務感・比較</a:t>
             </a:r>
@@ -25911,6 +27189,9 @@
                 <a:solidFill>
                   <a:srgbClr val="0B3C6E"/>
                 </a:solidFill>
+                <a:latin typeface="BIZ UDPゴシック"/>
+                <a:ea typeface="BIZ UDPゴシック"/>
+                <a:cs typeface="BIZ UDPゴシック"/>
               </a:rPr>
               <a:t>選ぶ → 1週間ためす → 実行チェック → 記録 → 毎晩更新 → 答え合わせ</a:t>
             </a:r>
@@ -26028,12 +27309,12 @@
           </a:fontRef>
         </p:style>
         <p:txBody>
-          <a:bodyPr rtlCol="0" anchor="ctr" wrap="square" lIns="45720" tIns="27432" rIns="45720" bIns="27432">
+          <a:bodyPr rtlCol="0" anchor="ctr" wrap="square" lIns="566928" tIns="27432" bIns="27432">
             <a:noAutofit/>
           </a:bodyPr>
           <a:lstStyle/>
           <a:p>
-            <a:pPr algn="ctr" marL="0" indent="0">
+            <a:pPr algn="l" marL="0" indent="0">
               <a:spcAft>
                 <a:spcPts val="400"/>
               </a:spcAft>
@@ -26044,6 +27325,9 @@
                 <a:solidFill>
                   <a:srgbClr val="E8457C"/>
                 </a:solidFill>
+                <a:latin typeface="BIZ UDPゴシック"/>
+                <a:ea typeface="BIZ UDPゴシック"/>
+                <a:cs typeface="BIZ UDPゴシック"/>
               </a:rPr>
               <a:t>セーフティ層：強いつらさの記録（WHO-5 素点13点未満など）では予測表示を止め、相談先を表示する</a:t>
             </a:r>
@@ -26167,12 +27451,12 @@
     </a:clrScheme>
     <a:fontScheme name="mixlab">
       <a:majorFont>
-        <a:latin typeface="Arial"/>
+        <a:latin typeface="BIZ UDPゴシック"/>
         <a:ea typeface="BIZ UDPゴシック"/>
         <a:cs typeface=""/>
       </a:majorFont>
       <a:minorFont>
-        <a:latin typeface="Arial"/>
+        <a:latin typeface="BIZ UDPゴシック"/>
         <a:ea typeface="BIZ UDPゴシック"/>
         <a:cs typeface=""/>
       </a:minorFont>
@@ -26368,7 +27652,7 @@
     </a:clrScheme>
     <a:fontScheme name="Office">
       <a:majorFont>
-        <a:latin typeface="游ゴシック Light" panose="020F0302020204030204"/>
+        <a:latin typeface="BIZ UDPゴシック"/>
         <a:ea typeface=""/>
         <a:cs typeface=""/>
         <a:font script="Jpan" typeface="游ゴシック Light"/>
@@ -26403,7 +27687,7 @@
         <a:font script="Geor" typeface="Sylfaen"/>
       </a:majorFont>
       <a:minorFont>
-        <a:latin typeface="游ゴシック" panose="020F0502020204030204"/>
+        <a:latin typeface="BIZ UDPゴシック"/>
         <a:ea typeface=""/>
         <a:cs typeface=""/>
         <a:font script="Jpan" typeface="游ゴシック"/>
